--- a/Description/ReservationEventProgram.pptx
+++ b/Description/ReservationEventProgram.pptx
@@ -272,7 +272,7 @@
           <a:p>
             <a:fld id="{DDCE6D58-9B57-4731-A47B-3CD41B48F0A9}" type="datetimeFigureOut">
               <a:rPr lang="de-CH" smtClean="0"/>
-              <a:t>16.04.2026</a:t>
+              <a:t>30.04.2026</a:t>
             </a:fld>
             <a:endParaRPr lang="de-CH"/>
           </a:p>
@@ -442,7 +442,7 @@
           <a:p>
             <a:fld id="{DDCE6D58-9B57-4731-A47B-3CD41B48F0A9}" type="datetimeFigureOut">
               <a:rPr lang="de-CH" smtClean="0"/>
-              <a:t>16.04.2026</a:t>
+              <a:t>30.04.2026</a:t>
             </a:fld>
             <a:endParaRPr lang="de-CH"/>
           </a:p>
@@ -622,7 +622,7 @@
           <a:p>
             <a:fld id="{DDCE6D58-9B57-4731-A47B-3CD41B48F0A9}" type="datetimeFigureOut">
               <a:rPr lang="de-CH" smtClean="0"/>
-              <a:t>16.04.2026</a:t>
+              <a:t>30.04.2026</a:t>
             </a:fld>
             <a:endParaRPr lang="de-CH"/>
           </a:p>
@@ -792,7 +792,7 @@
           <a:p>
             <a:fld id="{DDCE6D58-9B57-4731-A47B-3CD41B48F0A9}" type="datetimeFigureOut">
               <a:rPr lang="de-CH" smtClean="0"/>
-              <a:t>16.04.2026</a:t>
+              <a:t>30.04.2026</a:t>
             </a:fld>
             <a:endParaRPr lang="de-CH"/>
           </a:p>
@@ -1038,7 +1038,7 @@
           <a:p>
             <a:fld id="{DDCE6D58-9B57-4731-A47B-3CD41B48F0A9}" type="datetimeFigureOut">
               <a:rPr lang="de-CH" smtClean="0"/>
-              <a:t>16.04.2026</a:t>
+              <a:t>30.04.2026</a:t>
             </a:fld>
             <a:endParaRPr lang="de-CH"/>
           </a:p>
@@ -1270,7 +1270,7 @@
           <a:p>
             <a:fld id="{DDCE6D58-9B57-4731-A47B-3CD41B48F0A9}" type="datetimeFigureOut">
               <a:rPr lang="de-CH" smtClean="0"/>
-              <a:t>16.04.2026</a:t>
+              <a:t>30.04.2026</a:t>
             </a:fld>
             <a:endParaRPr lang="de-CH"/>
           </a:p>
@@ -1637,7 +1637,7 @@
           <a:p>
             <a:fld id="{DDCE6D58-9B57-4731-A47B-3CD41B48F0A9}" type="datetimeFigureOut">
               <a:rPr lang="de-CH" smtClean="0"/>
-              <a:t>16.04.2026</a:t>
+              <a:t>30.04.2026</a:t>
             </a:fld>
             <a:endParaRPr lang="de-CH"/>
           </a:p>
@@ -1755,7 +1755,7 @@
           <a:p>
             <a:fld id="{DDCE6D58-9B57-4731-A47B-3CD41B48F0A9}" type="datetimeFigureOut">
               <a:rPr lang="de-CH" smtClean="0"/>
-              <a:t>16.04.2026</a:t>
+              <a:t>30.04.2026</a:t>
             </a:fld>
             <a:endParaRPr lang="de-CH"/>
           </a:p>
@@ -1850,7 +1850,7 @@
           <a:p>
             <a:fld id="{DDCE6D58-9B57-4731-A47B-3CD41B48F0A9}" type="datetimeFigureOut">
               <a:rPr lang="de-CH" smtClean="0"/>
-              <a:t>16.04.2026</a:t>
+              <a:t>30.04.2026</a:t>
             </a:fld>
             <a:endParaRPr lang="de-CH"/>
           </a:p>
@@ -2127,7 +2127,7 @@
           <a:p>
             <a:fld id="{DDCE6D58-9B57-4731-A47B-3CD41B48F0A9}" type="datetimeFigureOut">
               <a:rPr lang="de-CH" smtClean="0"/>
-              <a:t>16.04.2026</a:t>
+              <a:t>30.04.2026</a:t>
             </a:fld>
             <a:endParaRPr lang="de-CH"/>
           </a:p>
@@ -2380,7 +2380,7 @@
           <a:p>
             <a:fld id="{DDCE6D58-9B57-4731-A47B-3CD41B48F0A9}" type="datetimeFigureOut">
               <a:rPr lang="de-CH" smtClean="0"/>
-              <a:t>16.04.2026</a:t>
+              <a:t>30.04.2026</a:t>
             </a:fld>
             <a:endParaRPr lang="de-CH"/>
           </a:p>
@@ -2593,7 +2593,7 @@
           <a:p>
             <a:fld id="{DDCE6D58-9B57-4731-A47B-3CD41B48F0A9}" type="datetimeFigureOut">
               <a:rPr lang="de-CH" smtClean="0"/>
-              <a:t>16.04.2026</a:t>
+              <a:t>30.04.2026</a:t>
             </a:fld>
             <a:endParaRPr lang="de-CH"/>
           </a:p>
@@ -2998,118 +2998,12 @@
           <a:chExt cx="0" cy="0"/>
         </a:xfrm>
       </p:grpSpPr>
-      <p:sp>
-        <p:nvSpPr>
-          <p:cNvPr id="3" name="Rechteck 2">
+      <p:pic>
+        <p:nvPicPr>
+          <p:cNvPr id="5" name="Grafik 4">
             <a:extLst>
               <a:ext uri="{FF2B5EF4-FFF2-40B4-BE49-F238E27FC236}">
-                <a16:creationId xmlns:a16="http://schemas.microsoft.com/office/drawing/2014/main" id="{B6CD7539-C69E-A460-D37D-2218C7759F15}"/>
-              </a:ext>
-            </a:extLst>
-          </p:cNvPr>
-          <p:cNvSpPr/>
-          <p:nvPr/>
-        </p:nvSpPr>
-        <p:spPr>
-          <a:xfrm>
-            <a:off x="0" y="142841"/>
-            <a:ext cx="6004140" cy="820882"/>
-          </a:xfrm>
-          <a:prstGeom prst="rect">
-            <a:avLst/>
-          </a:prstGeom>
-          <a:solidFill>
-            <a:schemeClr val="tx1"/>
-          </a:solidFill>
-          <a:ln>
-            <a:solidFill>
-              <a:schemeClr val="tx1"/>
-            </a:solidFill>
-          </a:ln>
-        </p:spPr>
-        <p:style>
-          <a:lnRef idx="2">
-            <a:schemeClr val="accent1">
-              <a:shade val="15000"/>
-            </a:schemeClr>
-          </a:lnRef>
-          <a:fillRef idx="1">
-            <a:schemeClr val="accent1"/>
-          </a:fillRef>
-          <a:effectRef idx="0">
-            <a:schemeClr val="accent1"/>
-          </a:effectRef>
-          <a:fontRef idx="minor">
-            <a:schemeClr val="lt1"/>
-          </a:fontRef>
-        </p:style>
-        <p:txBody>
-          <a:bodyPr rtlCol="0" anchor="ctr"/>
-          <a:lstStyle/>
-          <a:p>
-            <a:pPr algn="ctr"/>
-            <a:endParaRPr lang="de-CH"/>
-          </a:p>
-        </p:txBody>
-      </p:sp>
-      <p:sp>
-        <p:nvSpPr>
-          <p:cNvPr id="4" name="Rechteck 3">
-            <a:extLst>
-              <a:ext uri="{FF2B5EF4-FFF2-40B4-BE49-F238E27FC236}">
-                <a16:creationId xmlns:a16="http://schemas.microsoft.com/office/drawing/2014/main" id="{A023A741-6C8E-9020-91EC-3F45B0DED0A6}"/>
-              </a:ext>
-            </a:extLst>
-          </p:cNvPr>
-          <p:cNvSpPr/>
-          <p:nvPr/>
-        </p:nvSpPr>
-        <p:spPr>
-          <a:xfrm>
-            <a:off x="0" y="963723"/>
-            <a:ext cx="6004140" cy="3882492"/>
-          </a:xfrm>
-          <a:prstGeom prst="rect">
-            <a:avLst/>
-          </a:prstGeom>
-          <a:noFill/>
-          <a:ln w="22225">
-            <a:solidFill>
-              <a:schemeClr val="accent1"/>
-            </a:solidFill>
-          </a:ln>
-        </p:spPr>
-        <p:style>
-          <a:lnRef idx="2">
-            <a:schemeClr val="accent1">
-              <a:shade val="15000"/>
-            </a:schemeClr>
-          </a:lnRef>
-          <a:fillRef idx="1">
-            <a:schemeClr val="accent1"/>
-          </a:fillRef>
-          <a:effectRef idx="0">
-            <a:schemeClr val="accent1"/>
-          </a:effectRef>
-          <a:fontRef idx="minor">
-            <a:schemeClr val="lt1"/>
-          </a:fontRef>
-        </p:style>
-        <p:txBody>
-          <a:bodyPr rtlCol="0" anchor="ctr"/>
-          <a:lstStyle/>
-          <a:p>
-            <a:pPr algn="ctr"/>
-            <a:endParaRPr lang="de-CH"/>
-          </a:p>
-        </p:txBody>
-      </p:sp>
-      <p:pic>
-        <p:nvPicPr>
-          <p:cNvPr id="7" name="Grafik 6">
-            <a:extLst>
-              <a:ext uri="{FF2B5EF4-FFF2-40B4-BE49-F238E27FC236}">
-                <a16:creationId xmlns:a16="http://schemas.microsoft.com/office/drawing/2014/main" id="{E3F86FA0-4A54-9D1A-FEC2-2BD3F85BBC7E}"/>
+                <a16:creationId xmlns:a16="http://schemas.microsoft.com/office/drawing/2014/main" id="{55CAF290-5B26-7A7C-CF40-5689D914E4AD}"/>
               </a:ext>
             </a:extLst>
           </p:cNvPr>
@@ -3126,8 +3020,8 @@
         </p:blipFill>
         <p:spPr>
           <a:xfrm>
-            <a:off x="1750577" y="251998"/>
-            <a:ext cx="2485596" cy="301284"/>
+            <a:off x="290043" y="235381"/>
+            <a:ext cx="5102840" cy="3706273"/>
           </a:xfrm>
           <a:prstGeom prst="rect">
             <a:avLst/>
@@ -3136,10 +3030,10 @@
       </p:pic>
       <p:pic>
         <p:nvPicPr>
-          <p:cNvPr id="9" name="Grafik 8">
+          <p:cNvPr id="8" name="Grafik 7">
             <a:extLst>
               <a:ext uri="{FF2B5EF4-FFF2-40B4-BE49-F238E27FC236}">
-                <a16:creationId xmlns:a16="http://schemas.microsoft.com/office/drawing/2014/main" id="{9CE3F2E0-EE11-CDC1-1E7F-370DCDF8BD6E}"/>
+                <a16:creationId xmlns:a16="http://schemas.microsoft.com/office/drawing/2014/main" id="{11E15D6C-86F3-138E-1DC0-EC950323C729}"/>
               </a:ext>
             </a:extLst>
           </p:cNvPr>
@@ -3156,8 +3050,8 @@
         </p:blipFill>
         <p:spPr>
           <a:xfrm>
-            <a:off x="5026657" y="224315"/>
-            <a:ext cx="695238" cy="304762"/>
+            <a:off x="5674268" y="235381"/>
+            <a:ext cx="5311862" cy="4128801"/>
           </a:xfrm>
           <a:prstGeom prst="rect">
             <a:avLst/>
@@ -3166,10 +3060,10 @@
       </p:pic>
       <p:pic>
         <p:nvPicPr>
-          <p:cNvPr id="11" name="Grafik 10">
+          <p:cNvPr id="13" name="Grafik 12">
             <a:extLst>
               <a:ext uri="{FF2B5EF4-FFF2-40B4-BE49-F238E27FC236}">
-                <a16:creationId xmlns:a16="http://schemas.microsoft.com/office/drawing/2014/main" id="{2EF91E4C-C01C-6A7A-9B42-A7CF5EA77548}"/>
+                <a16:creationId xmlns:a16="http://schemas.microsoft.com/office/drawing/2014/main" id="{0092FFF4-DE70-ADC1-5372-690695C79743}"/>
               </a:ext>
             </a:extLst>
           </p:cNvPr>
@@ -3186,2189 +3080,14 @@
         </p:blipFill>
         <p:spPr>
           <a:xfrm>
-            <a:off x="5055228" y="610551"/>
-            <a:ext cx="666667" cy="266667"/>
+            <a:off x="249346" y="3941654"/>
+            <a:ext cx="5184234" cy="3735128"/>
           </a:xfrm>
           <a:prstGeom prst="rect">
             <a:avLst/>
           </a:prstGeom>
         </p:spPr>
       </p:pic>
-      <p:sp>
-        <p:nvSpPr>
-          <p:cNvPr id="12" name="Textfeld 11">
-            <a:extLst>
-              <a:ext uri="{FF2B5EF4-FFF2-40B4-BE49-F238E27FC236}">
-                <a16:creationId xmlns:a16="http://schemas.microsoft.com/office/drawing/2014/main" id="{997BBD09-D1C1-334C-F47D-DE129CC0108F}"/>
-              </a:ext>
-            </a:extLst>
-          </p:cNvPr>
-          <p:cNvSpPr txBox="1"/>
-          <p:nvPr/>
-        </p:nvSpPr>
-        <p:spPr>
-          <a:xfrm>
-            <a:off x="1886926" y="507886"/>
-            <a:ext cx="2485017" cy="369332"/>
-          </a:xfrm>
-          <a:prstGeom prst="rect">
-            <a:avLst/>
-          </a:prstGeom>
-          <a:noFill/>
-        </p:spPr>
-        <p:txBody>
-          <a:bodyPr wrap="square" rtlCol="0">
-            <a:spAutoFit/>
-          </a:bodyPr>
-          <a:lstStyle/>
-          <a:p>
-            <a:r>
-              <a:rPr lang="de-CH" b="1" dirty="0">
-                <a:solidFill>
-                  <a:srgbClr val="FF0000"/>
-                </a:solidFill>
-                <a:latin typeface="Arial" panose="020B0604020202020204" pitchFamily="34" charset="0"/>
-                <a:cs typeface="Arial" panose="020B0604020202020204" pitchFamily="34" charset="0"/>
-              </a:rPr>
-              <a:t>Event Programm</a:t>
-            </a:r>
-          </a:p>
-        </p:txBody>
-      </p:sp>
-      <p:sp>
-        <p:nvSpPr>
-          <p:cNvPr id="18" name="Textfeld 17">
-            <a:extLst>
-              <a:ext uri="{FF2B5EF4-FFF2-40B4-BE49-F238E27FC236}">
-                <a16:creationId xmlns:a16="http://schemas.microsoft.com/office/drawing/2014/main" id="{8533B003-5219-3675-C257-90FAC14D1E24}"/>
-              </a:ext>
-            </a:extLst>
-          </p:cNvPr>
-          <p:cNvSpPr txBox="1"/>
-          <p:nvPr/>
-        </p:nvSpPr>
-        <p:spPr>
-          <a:xfrm>
-            <a:off x="115414" y="1034945"/>
-            <a:ext cx="2485017" cy="369332"/>
-          </a:xfrm>
-          <a:prstGeom prst="rect">
-            <a:avLst/>
-          </a:prstGeom>
-          <a:noFill/>
-        </p:spPr>
-        <p:txBody>
-          <a:bodyPr wrap="square" rtlCol="0">
-            <a:spAutoFit/>
-          </a:bodyPr>
-          <a:lstStyle/>
-          <a:p>
-            <a:r>
-              <a:rPr lang="de-CH" b="1" dirty="0">
-                <a:latin typeface="Arial" panose="020B0604020202020204" pitchFamily="34" charset="0"/>
-                <a:cs typeface="Arial" panose="020B0604020202020204" pitchFamily="34" charset="0"/>
-              </a:rPr>
-              <a:t>1. Server Ordner </a:t>
-            </a:r>
-          </a:p>
-        </p:txBody>
-      </p:sp>
-      <p:pic>
-        <p:nvPicPr>
-          <p:cNvPr id="20" name="Grafik 19">
-            <a:extLst>
-              <a:ext uri="{FF2B5EF4-FFF2-40B4-BE49-F238E27FC236}">
-                <a16:creationId xmlns:a16="http://schemas.microsoft.com/office/drawing/2014/main" id="{AB0CA318-0646-25BE-6438-00CE8B45FC81}"/>
-              </a:ext>
-            </a:extLst>
-          </p:cNvPr>
-          <p:cNvPicPr>
-            <a:picLocks noChangeAspect="1"/>
-          </p:cNvPicPr>
-          <p:nvPr/>
-        </p:nvPicPr>
-        <p:blipFill>
-          <a:blip r:embed="rId5"/>
-          <a:stretch>
-            <a:fillRect/>
-          </a:stretch>
-        </p:blipFill>
-        <p:spPr>
-          <a:xfrm>
-            <a:off x="258703" y="1380749"/>
-            <a:ext cx="2457143" cy="428571"/>
-          </a:xfrm>
-          <a:prstGeom prst="rect">
-            <a:avLst/>
-          </a:prstGeom>
-        </p:spPr>
-      </p:pic>
-      <p:pic>
-        <p:nvPicPr>
-          <p:cNvPr id="22" name="Grafik 21">
-            <a:extLst>
-              <a:ext uri="{FF2B5EF4-FFF2-40B4-BE49-F238E27FC236}">
-                <a16:creationId xmlns:a16="http://schemas.microsoft.com/office/drawing/2014/main" id="{1A0A4E7A-5D3B-AE6A-E433-57AB563FA996}"/>
-              </a:ext>
-            </a:extLst>
-          </p:cNvPr>
-          <p:cNvPicPr>
-            <a:picLocks noChangeAspect="1"/>
-          </p:cNvPicPr>
-          <p:nvPr/>
-        </p:nvPicPr>
-        <p:blipFill>
-          <a:blip r:embed="rId6"/>
-          <a:stretch>
-            <a:fillRect/>
-          </a:stretch>
-        </p:blipFill>
-        <p:spPr>
-          <a:xfrm>
-            <a:off x="3440412" y="1523606"/>
-            <a:ext cx="2438095" cy="285714"/>
-          </a:xfrm>
-          <a:prstGeom prst="rect">
-            <a:avLst/>
-          </a:prstGeom>
-        </p:spPr>
-      </p:pic>
-      <p:sp>
-        <p:nvSpPr>
-          <p:cNvPr id="23" name="Textfeld 22">
-            <a:extLst>
-              <a:ext uri="{FF2B5EF4-FFF2-40B4-BE49-F238E27FC236}">
-                <a16:creationId xmlns:a16="http://schemas.microsoft.com/office/drawing/2014/main" id="{DB6957EA-A1D8-B703-874A-75A268165FFB}"/>
-              </a:ext>
-            </a:extLst>
-          </p:cNvPr>
-          <p:cNvSpPr txBox="1"/>
-          <p:nvPr/>
-        </p:nvSpPr>
-        <p:spPr>
-          <a:xfrm>
-            <a:off x="3372019" y="1307738"/>
-            <a:ext cx="2506487" cy="276999"/>
-          </a:xfrm>
-          <a:prstGeom prst="rect">
-            <a:avLst/>
-          </a:prstGeom>
-          <a:noFill/>
-        </p:spPr>
-        <p:txBody>
-          <a:bodyPr wrap="square" rtlCol="0">
-            <a:spAutoFit/>
-          </a:bodyPr>
-          <a:lstStyle/>
-          <a:p>
-            <a:r>
-              <a:rPr lang="de-CH" sz="1200" b="1" dirty="0">
-                <a:latin typeface="Arial" panose="020B0604020202020204" pitchFamily="34" charset="0"/>
-                <a:cs typeface="Arial" panose="020B0604020202020204" pitchFamily="34" charset="0"/>
-              </a:rPr>
-              <a:t>Ordner für das Event Programm</a:t>
-            </a:r>
-          </a:p>
-        </p:txBody>
-      </p:sp>
-      <p:cxnSp>
-        <p:nvCxnSpPr>
-          <p:cNvPr id="25" name="Gerader Verbinder 24">
-            <a:extLst>
-              <a:ext uri="{FF2B5EF4-FFF2-40B4-BE49-F238E27FC236}">
-                <a16:creationId xmlns:a16="http://schemas.microsoft.com/office/drawing/2014/main" id="{CB5F6AD4-4FB6-8E8B-C33E-0302B59A9406}"/>
-              </a:ext>
-            </a:extLst>
-          </p:cNvPr>
-          <p:cNvCxnSpPr>
-            <a:cxnSpLocks/>
-          </p:cNvCxnSpPr>
-          <p:nvPr/>
-        </p:nvCxnSpPr>
-        <p:spPr>
-          <a:xfrm>
-            <a:off x="-1" y="1964185"/>
-            <a:ext cx="6004141" cy="0"/>
-          </a:xfrm>
-          <a:prstGeom prst="line">
-            <a:avLst/>
-          </a:prstGeom>
-          <a:ln w="38100">
-            <a:prstDash val="dash"/>
-          </a:ln>
-        </p:spPr>
-        <p:style>
-          <a:lnRef idx="1">
-            <a:schemeClr val="accent1"/>
-          </a:lnRef>
-          <a:fillRef idx="0">
-            <a:schemeClr val="accent1"/>
-          </a:fillRef>
-          <a:effectRef idx="0">
-            <a:schemeClr val="accent1"/>
-          </a:effectRef>
-          <a:fontRef idx="minor">
-            <a:schemeClr val="tx1"/>
-          </a:fontRef>
-        </p:style>
-      </p:cxnSp>
-      <p:sp>
-        <p:nvSpPr>
-          <p:cNvPr id="28" name="Textfeld 27">
-            <a:extLst>
-              <a:ext uri="{FF2B5EF4-FFF2-40B4-BE49-F238E27FC236}">
-                <a16:creationId xmlns:a16="http://schemas.microsoft.com/office/drawing/2014/main" id="{1E1676B4-E272-5411-40EF-03A75E246D4F}"/>
-              </a:ext>
-            </a:extLst>
-          </p:cNvPr>
-          <p:cNvSpPr txBox="1"/>
-          <p:nvPr/>
-        </p:nvSpPr>
-        <p:spPr>
-          <a:xfrm>
-            <a:off x="83141" y="2004102"/>
-            <a:ext cx="4002686" cy="369332"/>
-          </a:xfrm>
-          <a:prstGeom prst="rect">
-            <a:avLst/>
-          </a:prstGeom>
-          <a:noFill/>
-        </p:spPr>
-        <p:txBody>
-          <a:bodyPr wrap="square" rtlCol="0">
-            <a:spAutoFit/>
-          </a:bodyPr>
-          <a:lstStyle/>
-          <a:p>
-            <a:r>
-              <a:rPr lang="de-CH" b="1" dirty="0">
-                <a:latin typeface="Arial" panose="020B0604020202020204" pitchFamily="34" charset="0"/>
-                <a:cs typeface="Arial" panose="020B0604020202020204" pitchFamily="34" charset="0"/>
-              </a:rPr>
-              <a:t>Start XML Datei</a:t>
-            </a:r>
-          </a:p>
-        </p:txBody>
-      </p:sp>
-      <p:sp>
-        <p:nvSpPr>
-          <p:cNvPr id="29" name="Rechteck 28">
-            <a:extLst>
-              <a:ext uri="{FF2B5EF4-FFF2-40B4-BE49-F238E27FC236}">
-                <a16:creationId xmlns:a16="http://schemas.microsoft.com/office/drawing/2014/main" id="{25E5BB7F-7FC3-83A8-B244-8E794E77252C}"/>
-              </a:ext>
-            </a:extLst>
-          </p:cNvPr>
-          <p:cNvSpPr/>
-          <p:nvPr/>
-        </p:nvSpPr>
-        <p:spPr>
-          <a:xfrm>
-            <a:off x="812991" y="2413350"/>
-            <a:ext cx="2189155" cy="289298"/>
-          </a:xfrm>
-          <a:prstGeom prst="rect">
-            <a:avLst/>
-          </a:prstGeom>
-          <a:noFill/>
-          <a:ln w="6350">
-            <a:solidFill>
-              <a:schemeClr val="tx1"/>
-            </a:solidFill>
-          </a:ln>
-        </p:spPr>
-        <p:style>
-          <a:lnRef idx="2">
-            <a:schemeClr val="accent1">
-              <a:shade val="15000"/>
-            </a:schemeClr>
-          </a:lnRef>
-          <a:fillRef idx="1">
-            <a:schemeClr val="accent1"/>
-          </a:fillRef>
-          <a:effectRef idx="0">
-            <a:schemeClr val="accent1"/>
-          </a:effectRef>
-          <a:fontRef idx="minor">
-            <a:schemeClr val="lt1"/>
-          </a:fontRef>
-        </p:style>
-        <p:txBody>
-          <a:bodyPr rtlCol="0" anchor="ctr"/>
-          <a:lstStyle/>
-          <a:p>
-            <a:pPr algn="ctr"/>
-            <a:endParaRPr lang="de-CH"/>
-          </a:p>
-        </p:txBody>
-      </p:sp>
-      <p:sp>
-        <p:nvSpPr>
-          <p:cNvPr id="30" name="Textfeld 29">
-            <a:extLst>
-              <a:ext uri="{FF2B5EF4-FFF2-40B4-BE49-F238E27FC236}">
-                <a16:creationId xmlns:a16="http://schemas.microsoft.com/office/drawing/2014/main" id="{0161A654-92EB-C99C-EAB0-EE038D4697B6}"/>
-              </a:ext>
-            </a:extLst>
-          </p:cNvPr>
-          <p:cNvSpPr txBox="1"/>
-          <p:nvPr/>
-        </p:nvSpPr>
-        <p:spPr>
-          <a:xfrm>
-            <a:off x="115414" y="2363467"/>
-            <a:ext cx="733999" cy="369332"/>
-          </a:xfrm>
-          <a:prstGeom prst="rect">
-            <a:avLst/>
-          </a:prstGeom>
-          <a:noFill/>
-        </p:spPr>
-        <p:txBody>
-          <a:bodyPr wrap="square" rtlCol="0">
-            <a:spAutoFit/>
-          </a:bodyPr>
-          <a:lstStyle/>
-          <a:p>
-            <a:r>
-              <a:rPr lang="de-CH" dirty="0">
-                <a:latin typeface="Arial" panose="020B0604020202020204" pitchFamily="34" charset="0"/>
-                <a:cs typeface="Arial" panose="020B0604020202020204" pitchFamily="34" charset="0"/>
-              </a:rPr>
-              <a:t>XML</a:t>
-            </a:r>
-            <a:r>
-              <a:rPr lang="de-CH" b="1" dirty="0">
-                <a:latin typeface="Arial" panose="020B0604020202020204" pitchFamily="34" charset="0"/>
-                <a:cs typeface="Arial" panose="020B0604020202020204" pitchFamily="34" charset="0"/>
-              </a:rPr>
-              <a:t> </a:t>
-            </a:r>
-          </a:p>
-        </p:txBody>
-      </p:sp>
-      <p:sp>
-        <p:nvSpPr>
-          <p:cNvPr id="31" name="Textfeld 30">
-            <a:extLst>
-              <a:ext uri="{FF2B5EF4-FFF2-40B4-BE49-F238E27FC236}">
-                <a16:creationId xmlns:a16="http://schemas.microsoft.com/office/drawing/2014/main" id="{1538CC07-8227-3A82-C808-63CDDBFC6355}"/>
-              </a:ext>
-            </a:extLst>
-          </p:cNvPr>
-          <p:cNvSpPr txBox="1"/>
-          <p:nvPr/>
-        </p:nvSpPr>
-        <p:spPr>
-          <a:xfrm>
-            <a:off x="812991" y="2404110"/>
-            <a:ext cx="1980959" cy="307777"/>
-          </a:xfrm>
-          <a:prstGeom prst="rect">
-            <a:avLst/>
-          </a:prstGeom>
-          <a:noFill/>
-        </p:spPr>
-        <p:txBody>
-          <a:bodyPr wrap="square" rtlCol="0">
-            <a:spAutoFit/>
-          </a:bodyPr>
-          <a:lstStyle/>
-          <a:p>
-            <a:r>
-              <a:rPr lang="de-CH" sz="1400" b="1" dirty="0">
-                <a:latin typeface="Arial" panose="020B0604020202020204" pitchFamily="34" charset="0"/>
-                <a:cs typeface="Arial" panose="020B0604020202020204" pitchFamily="34" charset="0"/>
-              </a:rPr>
-              <a:t>EventProgram.xml</a:t>
-            </a:r>
-          </a:p>
-        </p:txBody>
-      </p:sp>
-      <p:sp>
-        <p:nvSpPr>
-          <p:cNvPr id="32" name="Rechteck 31">
-            <a:extLst>
-              <a:ext uri="{FF2B5EF4-FFF2-40B4-BE49-F238E27FC236}">
-                <a16:creationId xmlns:a16="http://schemas.microsoft.com/office/drawing/2014/main" id="{DD23A5A1-5E6B-08EC-9D73-DF3BAA0F561A}"/>
-              </a:ext>
-            </a:extLst>
-          </p:cNvPr>
-          <p:cNvSpPr/>
-          <p:nvPr/>
-        </p:nvSpPr>
-        <p:spPr>
-          <a:xfrm>
-            <a:off x="3090448" y="2413350"/>
-            <a:ext cx="1341658" cy="289298"/>
-          </a:xfrm>
-          <a:prstGeom prst="rect">
-            <a:avLst/>
-          </a:prstGeom>
-          <a:solidFill>
-            <a:schemeClr val="bg1">
-              <a:lumMod val="85000"/>
-            </a:schemeClr>
-          </a:solidFill>
-          <a:ln w="6350">
-            <a:solidFill>
-              <a:schemeClr val="tx1"/>
-            </a:solidFill>
-          </a:ln>
-        </p:spPr>
-        <p:style>
-          <a:lnRef idx="2">
-            <a:schemeClr val="accent1">
-              <a:shade val="15000"/>
-            </a:schemeClr>
-          </a:lnRef>
-          <a:fillRef idx="1">
-            <a:schemeClr val="accent1"/>
-          </a:fillRef>
-          <a:effectRef idx="0">
-            <a:schemeClr val="accent1"/>
-          </a:effectRef>
-          <a:fontRef idx="minor">
-            <a:schemeClr val="lt1"/>
-          </a:fontRef>
-        </p:style>
-        <p:txBody>
-          <a:bodyPr rtlCol="0" anchor="ctr"/>
-          <a:lstStyle/>
-          <a:p>
-            <a:pPr algn="ctr"/>
-            <a:r>
-              <a:rPr lang="de-CH" dirty="0">
-                <a:solidFill>
-                  <a:schemeClr val="tx1"/>
-                </a:solidFill>
-                <a:latin typeface="Arial" panose="020B0604020202020204" pitchFamily="34" charset="0"/>
-                <a:cs typeface="Arial" panose="020B0604020202020204" pitchFamily="34" charset="0"/>
-              </a:rPr>
-              <a:t>2. Upload</a:t>
-            </a:r>
-          </a:p>
-        </p:txBody>
-      </p:sp>
-      <p:sp>
-        <p:nvSpPr>
-          <p:cNvPr id="33" name="Rechteck 32">
-            <a:extLst>
-              <a:ext uri="{FF2B5EF4-FFF2-40B4-BE49-F238E27FC236}">
-                <a16:creationId xmlns:a16="http://schemas.microsoft.com/office/drawing/2014/main" id="{BB095F80-A35A-D5EB-8EE3-B25E3DCEA757}"/>
-              </a:ext>
-            </a:extLst>
-          </p:cNvPr>
-          <p:cNvSpPr/>
-          <p:nvPr/>
-        </p:nvSpPr>
-        <p:spPr>
-          <a:xfrm>
-            <a:off x="4585001" y="2403484"/>
-            <a:ext cx="1341658" cy="289298"/>
-          </a:xfrm>
-          <a:prstGeom prst="rect">
-            <a:avLst/>
-          </a:prstGeom>
-          <a:solidFill>
-            <a:schemeClr val="bg1">
-              <a:lumMod val="85000"/>
-            </a:schemeClr>
-          </a:solidFill>
-          <a:ln w="6350">
-            <a:solidFill>
-              <a:schemeClr val="tx1"/>
-            </a:solidFill>
-          </a:ln>
-        </p:spPr>
-        <p:style>
-          <a:lnRef idx="2">
-            <a:schemeClr val="accent1">
-              <a:shade val="15000"/>
-            </a:schemeClr>
-          </a:lnRef>
-          <a:fillRef idx="1">
-            <a:schemeClr val="accent1"/>
-          </a:fillRef>
-          <a:effectRef idx="0">
-            <a:schemeClr val="accent1"/>
-          </a:effectRef>
-          <a:fontRef idx="minor">
-            <a:schemeClr val="lt1"/>
-          </a:fontRef>
-        </p:style>
-        <p:txBody>
-          <a:bodyPr rtlCol="0" anchor="ctr"/>
-          <a:lstStyle/>
-          <a:p>
-            <a:pPr algn="ctr"/>
-            <a:r>
-              <a:rPr lang="de-CH" dirty="0">
-                <a:solidFill>
-                  <a:schemeClr val="tx1"/>
-                </a:solidFill>
-                <a:latin typeface="Arial" panose="020B0604020202020204" pitchFamily="34" charset="0"/>
-                <a:cs typeface="Arial" panose="020B0604020202020204" pitchFamily="34" charset="0"/>
-              </a:rPr>
-              <a:t>Download</a:t>
-            </a:r>
-          </a:p>
-        </p:txBody>
-      </p:sp>
-      <p:cxnSp>
-        <p:nvCxnSpPr>
-          <p:cNvPr id="34" name="Gerader Verbinder 33">
-            <a:extLst>
-              <a:ext uri="{FF2B5EF4-FFF2-40B4-BE49-F238E27FC236}">
-                <a16:creationId xmlns:a16="http://schemas.microsoft.com/office/drawing/2014/main" id="{F8170A12-E6D0-96CC-2E75-77E28C4006C6}"/>
-              </a:ext>
-            </a:extLst>
-          </p:cNvPr>
-          <p:cNvCxnSpPr>
-            <a:cxnSpLocks/>
-          </p:cNvCxnSpPr>
-          <p:nvPr/>
-        </p:nvCxnSpPr>
-        <p:spPr>
-          <a:xfrm>
-            <a:off x="-1" y="3357351"/>
-            <a:ext cx="6004141" cy="0"/>
-          </a:xfrm>
-          <a:prstGeom prst="line">
-            <a:avLst/>
-          </a:prstGeom>
-          <a:ln w="38100">
-            <a:prstDash val="dash"/>
-          </a:ln>
-        </p:spPr>
-        <p:style>
-          <a:lnRef idx="1">
-            <a:schemeClr val="accent1"/>
-          </a:lnRef>
-          <a:fillRef idx="0">
-            <a:schemeClr val="accent1"/>
-          </a:fillRef>
-          <a:effectRef idx="0">
-            <a:schemeClr val="accent1"/>
-          </a:effectRef>
-          <a:fontRef idx="minor">
-            <a:schemeClr val="tx1"/>
-          </a:fontRef>
-        </p:style>
-      </p:cxnSp>
-      <p:sp>
-        <p:nvSpPr>
-          <p:cNvPr id="35" name="Textfeld 34">
-            <a:extLst>
-              <a:ext uri="{FF2B5EF4-FFF2-40B4-BE49-F238E27FC236}">
-                <a16:creationId xmlns:a16="http://schemas.microsoft.com/office/drawing/2014/main" id="{40016B5F-2F4F-8108-5974-6F5277EEF65E}"/>
-              </a:ext>
-            </a:extLst>
-          </p:cNvPr>
-          <p:cNvSpPr txBox="1"/>
-          <p:nvPr/>
-        </p:nvSpPr>
-        <p:spPr>
-          <a:xfrm>
-            <a:off x="32876" y="3397368"/>
-            <a:ext cx="4002686" cy="369332"/>
-          </a:xfrm>
-          <a:prstGeom prst="rect">
-            <a:avLst/>
-          </a:prstGeom>
-          <a:noFill/>
-        </p:spPr>
-        <p:txBody>
-          <a:bodyPr wrap="square" rtlCol="0">
-            <a:spAutoFit/>
-          </a:bodyPr>
-          <a:lstStyle/>
-          <a:p>
-            <a:r>
-              <a:rPr lang="de-CH" b="1" dirty="0">
-                <a:latin typeface="Arial" panose="020B0604020202020204" pitchFamily="34" charset="0"/>
-                <a:cs typeface="Arial" panose="020B0604020202020204" pitchFamily="34" charset="0"/>
-              </a:rPr>
-              <a:t>3. Event wählen</a:t>
-            </a:r>
-          </a:p>
-        </p:txBody>
-      </p:sp>
-      <p:sp>
-        <p:nvSpPr>
-          <p:cNvPr id="36" name="Rechteck 35">
-            <a:extLst>
-              <a:ext uri="{FF2B5EF4-FFF2-40B4-BE49-F238E27FC236}">
-                <a16:creationId xmlns:a16="http://schemas.microsoft.com/office/drawing/2014/main" id="{CE517F27-D5AF-C108-1A07-673720DC53DD}"/>
-              </a:ext>
-            </a:extLst>
-          </p:cNvPr>
-          <p:cNvSpPr/>
-          <p:nvPr/>
-        </p:nvSpPr>
-        <p:spPr>
-          <a:xfrm>
-            <a:off x="258703" y="3806716"/>
-            <a:ext cx="5463192" cy="289298"/>
-          </a:xfrm>
-          <a:prstGeom prst="rect">
-            <a:avLst/>
-          </a:prstGeom>
-          <a:noFill/>
-          <a:ln w="6350">
-            <a:solidFill>
-              <a:schemeClr val="tx1"/>
-            </a:solidFill>
-          </a:ln>
-        </p:spPr>
-        <p:style>
-          <a:lnRef idx="2">
-            <a:schemeClr val="accent1">
-              <a:shade val="15000"/>
-            </a:schemeClr>
-          </a:lnRef>
-          <a:fillRef idx="1">
-            <a:schemeClr val="accent1"/>
-          </a:fillRef>
-          <a:effectRef idx="0">
-            <a:schemeClr val="accent1"/>
-          </a:effectRef>
-          <a:fontRef idx="minor">
-            <a:schemeClr val="lt1"/>
-          </a:fontRef>
-        </p:style>
-        <p:txBody>
-          <a:bodyPr rtlCol="0" anchor="ctr"/>
-          <a:lstStyle/>
-          <a:p>
-            <a:pPr algn="ctr"/>
-            <a:endParaRPr lang="de-CH"/>
-          </a:p>
-        </p:txBody>
-      </p:sp>
-      <p:pic>
-        <p:nvPicPr>
-          <p:cNvPr id="38" name="Grafik 37">
-            <a:extLst>
-              <a:ext uri="{FF2B5EF4-FFF2-40B4-BE49-F238E27FC236}">
-                <a16:creationId xmlns:a16="http://schemas.microsoft.com/office/drawing/2014/main" id="{94B46DE3-1385-45D5-7AA9-0C12807AA1C8}"/>
-              </a:ext>
-            </a:extLst>
-          </p:cNvPr>
-          <p:cNvPicPr>
-            <a:picLocks noChangeAspect="1"/>
-          </p:cNvPicPr>
-          <p:nvPr/>
-        </p:nvPicPr>
-        <p:blipFill>
-          <a:blip r:embed="rId7"/>
-          <a:stretch>
-            <a:fillRect/>
-          </a:stretch>
-        </p:blipFill>
-        <p:spPr>
-          <a:xfrm>
-            <a:off x="5330294" y="3838955"/>
-            <a:ext cx="340826" cy="288390"/>
-          </a:xfrm>
-          <a:prstGeom prst="rect">
-            <a:avLst/>
-          </a:prstGeom>
-        </p:spPr>
-      </p:pic>
-      <p:sp>
-        <p:nvSpPr>
-          <p:cNvPr id="39" name="Textfeld 38">
-            <a:extLst>
-              <a:ext uri="{FF2B5EF4-FFF2-40B4-BE49-F238E27FC236}">
-                <a16:creationId xmlns:a16="http://schemas.microsoft.com/office/drawing/2014/main" id="{2FE4F9C8-4A67-91F9-7B92-87E36821512B}"/>
-              </a:ext>
-            </a:extLst>
-          </p:cNvPr>
-          <p:cNvSpPr txBox="1"/>
-          <p:nvPr/>
-        </p:nvSpPr>
-        <p:spPr>
-          <a:xfrm>
-            <a:off x="258703" y="3788036"/>
-            <a:ext cx="2674432" cy="307777"/>
-          </a:xfrm>
-          <a:prstGeom prst="rect">
-            <a:avLst/>
-          </a:prstGeom>
-          <a:noFill/>
-        </p:spPr>
-        <p:txBody>
-          <a:bodyPr wrap="square" rtlCol="0">
-            <a:spAutoFit/>
-          </a:bodyPr>
-          <a:lstStyle/>
-          <a:p>
-            <a:r>
-              <a:rPr lang="de-CH" sz="1400" b="1" dirty="0">
-                <a:latin typeface="Arial" panose="020B0604020202020204" pitchFamily="34" charset="0"/>
-                <a:cs typeface="Arial" panose="020B0604020202020204" pitchFamily="34" charset="0"/>
-              </a:rPr>
-              <a:t>Datum Name des Events</a:t>
-            </a:r>
-          </a:p>
-        </p:txBody>
-      </p:sp>
-      <p:sp>
-        <p:nvSpPr>
-          <p:cNvPr id="40" name="Rechteck 39">
-            <a:extLst>
-              <a:ext uri="{FF2B5EF4-FFF2-40B4-BE49-F238E27FC236}">
-                <a16:creationId xmlns:a16="http://schemas.microsoft.com/office/drawing/2014/main" id="{A9086372-473C-49E0-2C02-D1D9CD4E3347}"/>
-              </a:ext>
-            </a:extLst>
-          </p:cNvPr>
-          <p:cNvSpPr/>
-          <p:nvPr/>
-        </p:nvSpPr>
-        <p:spPr>
-          <a:xfrm>
-            <a:off x="254261" y="4216064"/>
-            <a:ext cx="1341658" cy="289298"/>
-          </a:xfrm>
-          <a:prstGeom prst="rect">
-            <a:avLst/>
-          </a:prstGeom>
-          <a:solidFill>
-            <a:schemeClr val="bg1">
-              <a:lumMod val="85000"/>
-            </a:schemeClr>
-          </a:solidFill>
-          <a:ln w="6350">
-            <a:solidFill>
-              <a:schemeClr val="tx1"/>
-            </a:solidFill>
-          </a:ln>
-        </p:spPr>
-        <p:style>
-          <a:lnRef idx="2">
-            <a:schemeClr val="accent1">
-              <a:shade val="15000"/>
-            </a:schemeClr>
-          </a:lnRef>
-          <a:fillRef idx="1">
-            <a:schemeClr val="accent1"/>
-          </a:fillRef>
-          <a:effectRef idx="0">
-            <a:schemeClr val="accent1"/>
-          </a:effectRef>
-          <a:fontRef idx="minor">
-            <a:schemeClr val="lt1"/>
-          </a:fontRef>
-        </p:style>
-        <p:txBody>
-          <a:bodyPr rtlCol="0" anchor="ctr"/>
-          <a:lstStyle/>
-          <a:p>
-            <a:pPr algn="ctr"/>
-            <a:r>
-              <a:rPr lang="de-CH" dirty="0">
-                <a:solidFill>
-                  <a:schemeClr val="tx1"/>
-                </a:solidFill>
-                <a:latin typeface="Arial" panose="020B0604020202020204" pitchFamily="34" charset="0"/>
-                <a:cs typeface="Arial" panose="020B0604020202020204" pitchFamily="34" charset="0"/>
-              </a:rPr>
-              <a:t>Löschen</a:t>
-            </a:r>
-          </a:p>
-        </p:txBody>
-      </p:sp>
-      <p:sp>
-        <p:nvSpPr>
-          <p:cNvPr id="41" name="Rechteck 40">
-            <a:extLst>
-              <a:ext uri="{FF2B5EF4-FFF2-40B4-BE49-F238E27FC236}">
-                <a16:creationId xmlns:a16="http://schemas.microsoft.com/office/drawing/2014/main" id="{124FB858-779A-85F7-A04D-06EDE822CAB0}"/>
-              </a:ext>
-            </a:extLst>
-          </p:cNvPr>
-          <p:cNvSpPr/>
-          <p:nvPr/>
-        </p:nvSpPr>
-        <p:spPr>
-          <a:xfrm>
-            <a:off x="4369186" y="4256080"/>
-            <a:ext cx="1341658" cy="289298"/>
-          </a:xfrm>
-          <a:prstGeom prst="rect">
-            <a:avLst/>
-          </a:prstGeom>
-          <a:solidFill>
-            <a:schemeClr val="bg1">
-              <a:lumMod val="85000"/>
-            </a:schemeClr>
-          </a:solidFill>
-          <a:ln w="6350">
-            <a:solidFill>
-              <a:schemeClr val="tx1"/>
-            </a:solidFill>
-          </a:ln>
-        </p:spPr>
-        <p:style>
-          <a:lnRef idx="2">
-            <a:schemeClr val="accent1">
-              <a:shade val="15000"/>
-            </a:schemeClr>
-          </a:lnRef>
-          <a:fillRef idx="1">
-            <a:schemeClr val="accent1"/>
-          </a:fillRef>
-          <a:effectRef idx="0">
-            <a:schemeClr val="accent1"/>
-          </a:effectRef>
-          <a:fontRef idx="minor">
-            <a:schemeClr val="lt1"/>
-          </a:fontRef>
-        </p:style>
-        <p:txBody>
-          <a:bodyPr rtlCol="0" anchor="ctr"/>
-          <a:lstStyle/>
-          <a:p>
-            <a:pPr algn="ctr"/>
-            <a:r>
-              <a:rPr lang="de-CH" dirty="0">
-                <a:solidFill>
-                  <a:schemeClr val="tx1"/>
-                </a:solidFill>
-                <a:latin typeface="Arial" panose="020B0604020202020204" pitchFamily="34" charset="0"/>
-                <a:cs typeface="Arial" panose="020B0604020202020204" pitchFamily="34" charset="0"/>
-              </a:rPr>
-              <a:t>Editieren</a:t>
-            </a:r>
-          </a:p>
-        </p:txBody>
-      </p:sp>
-      <p:sp>
-        <p:nvSpPr>
-          <p:cNvPr id="46" name="Rechteck 45">
-            <a:extLst>
-              <a:ext uri="{FF2B5EF4-FFF2-40B4-BE49-F238E27FC236}">
-                <a16:creationId xmlns:a16="http://schemas.microsoft.com/office/drawing/2014/main" id="{4FE6A301-FE5A-8EBC-3E91-7A8C42264115}"/>
-              </a:ext>
-            </a:extLst>
-          </p:cNvPr>
-          <p:cNvSpPr/>
-          <p:nvPr/>
-        </p:nvSpPr>
-        <p:spPr>
-          <a:xfrm>
-            <a:off x="6050140" y="963723"/>
-            <a:ext cx="6004140" cy="3882492"/>
-          </a:xfrm>
-          <a:prstGeom prst="rect">
-            <a:avLst/>
-          </a:prstGeom>
-          <a:noFill/>
-          <a:ln w="22225">
-            <a:solidFill>
-              <a:schemeClr val="accent1"/>
-            </a:solidFill>
-          </a:ln>
-        </p:spPr>
-        <p:style>
-          <a:lnRef idx="2">
-            <a:schemeClr val="accent1">
-              <a:shade val="15000"/>
-            </a:schemeClr>
-          </a:lnRef>
-          <a:fillRef idx="1">
-            <a:schemeClr val="accent1"/>
-          </a:fillRef>
-          <a:effectRef idx="0">
-            <a:schemeClr val="accent1"/>
-          </a:effectRef>
-          <a:fontRef idx="minor">
-            <a:schemeClr val="lt1"/>
-          </a:fontRef>
-        </p:style>
-        <p:txBody>
-          <a:bodyPr rtlCol="0" anchor="ctr"/>
-          <a:lstStyle/>
-          <a:p>
-            <a:pPr algn="ctr"/>
-            <a:endParaRPr lang="de-CH"/>
-          </a:p>
-        </p:txBody>
-      </p:sp>
-      <p:sp>
-        <p:nvSpPr>
-          <p:cNvPr id="47" name="Textfeld 46">
-            <a:extLst>
-              <a:ext uri="{FF2B5EF4-FFF2-40B4-BE49-F238E27FC236}">
-                <a16:creationId xmlns:a16="http://schemas.microsoft.com/office/drawing/2014/main" id="{B12F7B63-8966-F401-8DD1-6A76F0674C5B}"/>
-              </a:ext>
-            </a:extLst>
-          </p:cNvPr>
-          <p:cNvSpPr txBox="1"/>
-          <p:nvPr/>
-        </p:nvSpPr>
-        <p:spPr>
-          <a:xfrm>
-            <a:off x="6119554" y="1076905"/>
-            <a:ext cx="2256037" cy="369332"/>
-          </a:xfrm>
-          <a:prstGeom prst="rect">
-            <a:avLst/>
-          </a:prstGeom>
-          <a:noFill/>
-        </p:spPr>
-        <p:txBody>
-          <a:bodyPr wrap="square" rtlCol="0">
-            <a:spAutoFit/>
-          </a:bodyPr>
-          <a:lstStyle/>
-          <a:p>
-            <a:r>
-              <a:rPr lang="de-CH" b="1" dirty="0">
-                <a:latin typeface="Arial" panose="020B0604020202020204" pitchFamily="34" charset="0"/>
-                <a:cs typeface="Arial" panose="020B0604020202020204" pitchFamily="34" charset="0"/>
-              </a:rPr>
-              <a:t>4. Event editieren</a:t>
-            </a:r>
-          </a:p>
-        </p:txBody>
-      </p:sp>
-      <p:sp>
-        <p:nvSpPr>
-          <p:cNvPr id="50" name="Rechteck 49">
-            <a:extLst>
-              <a:ext uri="{FF2B5EF4-FFF2-40B4-BE49-F238E27FC236}">
-                <a16:creationId xmlns:a16="http://schemas.microsoft.com/office/drawing/2014/main" id="{520D400F-FDC4-B874-5171-0439940D34D4}"/>
-              </a:ext>
-            </a:extLst>
-          </p:cNvPr>
-          <p:cNvSpPr/>
-          <p:nvPr/>
-        </p:nvSpPr>
-        <p:spPr>
-          <a:xfrm>
-            <a:off x="6408768" y="1786079"/>
-            <a:ext cx="1822380" cy="289298"/>
-          </a:xfrm>
-          <a:prstGeom prst="rect">
-            <a:avLst/>
-          </a:prstGeom>
-          <a:noFill/>
-          <a:ln w="6350">
-            <a:solidFill>
-              <a:schemeClr val="tx1"/>
-            </a:solidFill>
-          </a:ln>
-        </p:spPr>
-        <p:style>
-          <a:lnRef idx="2">
-            <a:schemeClr val="accent1">
-              <a:shade val="15000"/>
-            </a:schemeClr>
-          </a:lnRef>
-          <a:fillRef idx="1">
-            <a:schemeClr val="accent1"/>
-          </a:fillRef>
-          <a:effectRef idx="0">
-            <a:schemeClr val="accent1"/>
-          </a:effectRef>
-          <a:fontRef idx="minor">
-            <a:schemeClr val="lt1"/>
-          </a:fontRef>
-        </p:style>
-        <p:txBody>
-          <a:bodyPr rtlCol="0" anchor="ctr"/>
-          <a:lstStyle/>
-          <a:p>
-            <a:r>
-              <a:rPr lang="de-CH" sz="1600" dirty="0">
-                <a:solidFill>
-                  <a:schemeClr val="tx1"/>
-                </a:solidFill>
-                <a:latin typeface="Arial" panose="020B0604020202020204" pitchFamily="34" charset="0"/>
-                <a:cs typeface="Arial" panose="020B0604020202020204" pitchFamily="34" charset="0"/>
-              </a:rPr>
-              <a:t>Datum</a:t>
-            </a:r>
-          </a:p>
-        </p:txBody>
-      </p:sp>
-      <p:sp>
-        <p:nvSpPr>
-          <p:cNvPr id="51" name="Rechteck 50">
-            <a:extLst>
-              <a:ext uri="{FF2B5EF4-FFF2-40B4-BE49-F238E27FC236}">
-                <a16:creationId xmlns:a16="http://schemas.microsoft.com/office/drawing/2014/main" id="{75B7A707-F9D2-7EE9-36C3-B747FCD5E4A9}"/>
-              </a:ext>
-            </a:extLst>
-          </p:cNvPr>
-          <p:cNvSpPr/>
-          <p:nvPr/>
-        </p:nvSpPr>
-        <p:spPr>
-          <a:xfrm>
-            <a:off x="8375591" y="1809320"/>
-            <a:ext cx="1122243" cy="289298"/>
-          </a:xfrm>
-          <a:prstGeom prst="rect">
-            <a:avLst/>
-          </a:prstGeom>
-          <a:noFill/>
-          <a:ln w="6350">
-            <a:solidFill>
-              <a:schemeClr val="tx1"/>
-            </a:solidFill>
-          </a:ln>
-        </p:spPr>
-        <p:style>
-          <a:lnRef idx="2">
-            <a:schemeClr val="accent1">
-              <a:shade val="15000"/>
-            </a:schemeClr>
-          </a:lnRef>
-          <a:fillRef idx="1">
-            <a:schemeClr val="accent1"/>
-          </a:fillRef>
-          <a:effectRef idx="0">
-            <a:schemeClr val="accent1"/>
-          </a:effectRef>
-          <a:fontRef idx="minor">
-            <a:schemeClr val="lt1"/>
-          </a:fontRef>
-        </p:style>
-        <p:txBody>
-          <a:bodyPr rtlCol="0" anchor="ctr"/>
-          <a:lstStyle/>
-          <a:p>
-            <a:r>
-              <a:rPr lang="de-CH" sz="1600" dirty="0">
-                <a:solidFill>
-                  <a:schemeClr val="tx1"/>
-                </a:solidFill>
-                <a:latin typeface="Arial" panose="020B0604020202020204" pitchFamily="34" charset="0"/>
-                <a:cs typeface="Arial" panose="020B0604020202020204" pitchFamily="34" charset="0"/>
-              </a:rPr>
-              <a:t>Start-Zeit</a:t>
-            </a:r>
-          </a:p>
-        </p:txBody>
-      </p:sp>
-      <p:sp>
-        <p:nvSpPr>
-          <p:cNvPr id="52" name="Rechteck 51">
-            <a:extLst>
-              <a:ext uri="{FF2B5EF4-FFF2-40B4-BE49-F238E27FC236}">
-                <a16:creationId xmlns:a16="http://schemas.microsoft.com/office/drawing/2014/main" id="{10C1C36E-9B5E-79ED-A624-37EE22D9F075}"/>
-              </a:ext>
-            </a:extLst>
-          </p:cNvPr>
-          <p:cNvSpPr/>
-          <p:nvPr/>
-        </p:nvSpPr>
-        <p:spPr>
-          <a:xfrm>
-            <a:off x="9642277" y="1819536"/>
-            <a:ext cx="1122243" cy="289298"/>
-          </a:xfrm>
-          <a:prstGeom prst="rect">
-            <a:avLst/>
-          </a:prstGeom>
-          <a:noFill/>
-          <a:ln w="6350">
-            <a:solidFill>
-              <a:schemeClr val="tx1"/>
-            </a:solidFill>
-          </a:ln>
-        </p:spPr>
-        <p:style>
-          <a:lnRef idx="2">
-            <a:schemeClr val="accent1">
-              <a:shade val="15000"/>
-            </a:schemeClr>
-          </a:lnRef>
-          <a:fillRef idx="1">
-            <a:schemeClr val="accent1"/>
-          </a:fillRef>
-          <a:effectRef idx="0">
-            <a:schemeClr val="accent1"/>
-          </a:effectRef>
-          <a:fontRef idx="minor">
-            <a:schemeClr val="lt1"/>
-          </a:fontRef>
-        </p:style>
-        <p:txBody>
-          <a:bodyPr rtlCol="0" anchor="ctr"/>
-          <a:lstStyle/>
-          <a:p>
-            <a:r>
-              <a:rPr lang="de-CH" sz="1600" dirty="0">
-                <a:solidFill>
-                  <a:schemeClr val="tx1"/>
-                </a:solidFill>
-                <a:latin typeface="Arial" panose="020B0604020202020204" pitchFamily="34" charset="0"/>
-                <a:cs typeface="Arial" panose="020B0604020202020204" pitchFamily="34" charset="0"/>
-              </a:rPr>
-              <a:t>End-Zeit</a:t>
-            </a:r>
-          </a:p>
-        </p:txBody>
-      </p:sp>
-      <p:sp>
-        <p:nvSpPr>
-          <p:cNvPr id="53" name="Rechteck 52">
-            <a:extLst>
-              <a:ext uri="{FF2B5EF4-FFF2-40B4-BE49-F238E27FC236}">
-                <a16:creationId xmlns:a16="http://schemas.microsoft.com/office/drawing/2014/main" id="{934BA0C2-63C6-D2D3-D041-F922E0F5378B}"/>
-              </a:ext>
-            </a:extLst>
-          </p:cNvPr>
-          <p:cNvSpPr/>
-          <p:nvPr/>
-        </p:nvSpPr>
-        <p:spPr>
-          <a:xfrm>
-            <a:off x="6391514" y="1414770"/>
-            <a:ext cx="2686900" cy="289298"/>
-          </a:xfrm>
-          <a:prstGeom prst="rect">
-            <a:avLst/>
-          </a:prstGeom>
-          <a:noFill/>
-          <a:ln w="6350">
-            <a:solidFill>
-              <a:schemeClr val="tx1"/>
-            </a:solidFill>
-          </a:ln>
-        </p:spPr>
-        <p:style>
-          <a:lnRef idx="2">
-            <a:schemeClr val="accent1">
-              <a:shade val="15000"/>
-            </a:schemeClr>
-          </a:lnRef>
-          <a:fillRef idx="1">
-            <a:schemeClr val="accent1"/>
-          </a:fillRef>
-          <a:effectRef idx="0">
-            <a:schemeClr val="accent1"/>
-          </a:effectRef>
-          <a:fontRef idx="minor">
-            <a:schemeClr val="lt1"/>
-          </a:fontRef>
-        </p:style>
-        <p:txBody>
-          <a:bodyPr rtlCol="0" anchor="ctr"/>
-          <a:lstStyle/>
-          <a:p>
-            <a:r>
-              <a:rPr lang="de-CH" sz="1600" dirty="0">
-                <a:solidFill>
-                  <a:schemeClr val="tx1"/>
-                </a:solidFill>
-                <a:latin typeface="Arial" panose="020B0604020202020204" pitchFamily="34" charset="0"/>
-                <a:cs typeface="Arial" panose="020B0604020202020204" pitchFamily="34" charset="0"/>
-              </a:rPr>
-              <a:t>Veranstalter</a:t>
-            </a:r>
-          </a:p>
-        </p:txBody>
-      </p:sp>
-      <p:sp>
-        <p:nvSpPr>
-          <p:cNvPr id="54" name="Rechteck 53">
-            <a:extLst>
-              <a:ext uri="{FF2B5EF4-FFF2-40B4-BE49-F238E27FC236}">
-                <a16:creationId xmlns:a16="http://schemas.microsoft.com/office/drawing/2014/main" id="{3A34D31D-2691-5781-D4E5-9B04A399AB97}"/>
-              </a:ext>
-            </a:extLst>
-          </p:cNvPr>
-          <p:cNvSpPr/>
-          <p:nvPr/>
-        </p:nvSpPr>
-        <p:spPr>
-          <a:xfrm>
-            <a:off x="9191825" y="1414770"/>
-            <a:ext cx="2686900" cy="289298"/>
-          </a:xfrm>
-          <a:prstGeom prst="rect">
-            <a:avLst/>
-          </a:prstGeom>
-          <a:noFill/>
-          <a:ln w="6350">
-            <a:solidFill>
-              <a:schemeClr val="tx1"/>
-            </a:solidFill>
-          </a:ln>
-        </p:spPr>
-        <p:style>
-          <a:lnRef idx="2">
-            <a:schemeClr val="accent1">
-              <a:shade val="15000"/>
-            </a:schemeClr>
-          </a:lnRef>
-          <a:fillRef idx="1">
-            <a:schemeClr val="accent1"/>
-          </a:fillRef>
-          <a:effectRef idx="0">
-            <a:schemeClr val="accent1"/>
-          </a:effectRef>
-          <a:fontRef idx="minor">
-            <a:schemeClr val="lt1"/>
-          </a:fontRef>
-        </p:style>
-        <p:txBody>
-          <a:bodyPr rtlCol="0" anchor="ctr"/>
-          <a:lstStyle/>
-          <a:p>
-            <a:r>
-              <a:rPr lang="de-CH" sz="1600" dirty="0">
-                <a:solidFill>
-                  <a:schemeClr val="tx1"/>
-                </a:solidFill>
-                <a:latin typeface="Arial" panose="020B0604020202020204" pitchFamily="34" charset="0"/>
-                <a:cs typeface="Arial" panose="020B0604020202020204" pitchFamily="34" charset="0"/>
-              </a:rPr>
-              <a:t>Lokal</a:t>
-            </a:r>
-          </a:p>
-        </p:txBody>
-      </p:sp>
-      <p:sp>
-        <p:nvSpPr>
-          <p:cNvPr id="55" name="Rechteck 54">
-            <a:extLst>
-              <a:ext uri="{FF2B5EF4-FFF2-40B4-BE49-F238E27FC236}">
-                <a16:creationId xmlns:a16="http://schemas.microsoft.com/office/drawing/2014/main" id="{E75A81CB-2E5B-0804-A1F6-770FA87A8D3F}"/>
-              </a:ext>
-            </a:extLst>
-          </p:cNvPr>
-          <p:cNvSpPr/>
-          <p:nvPr/>
-        </p:nvSpPr>
-        <p:spPr>
-          <a:xfrm>
-            <a:off x="6408767" y="2172525"/>
-            <a:ext cx="5469957" cy="289298"/>
-          </a:xfrm>
-          <a:prstGeom prst="rect">
-            <a:avLst/>
-          </a:prstGeom>
-          <a:noFill/>
-          <a:ln w="6350">
-            <a:solidFill>
-              <a:schemeClr val="tx1"/>
-            </a:solidFill>
-          </a:ln>
-        </p:spPr>
-        <p:style>
-          <a:lnRef idx="2">
-            <a:schemeClr val="accent1">
-              <a:shade val="15000"/>
-            </a:schemeClr>
-          </a:lnRef>
-          <a:fillRef idx="1">
-            <a:schemeClr val="accent1"/>
-          </a:fillRef>
-          <a:effectRef idx="0">
-            <a:schemeClr val="accent1"/>
-          </a:effectRef>
-          <a:fontRef idx="minor">
-            <a:schemeClr val="lt1"/>
-          </a:fontRef>
-        </p:style>
-        <p:txBody>
-          <a:bodyPr rtlCol="0" anchor="ctr"/>
-          <a:lstStyle/>
-          <a:p>
-            <a:r>
-              <a:rPr lang="de-CH" sz="1600" dirty="0">
-                <a:solidFill>
-                  <a:schemeClr val="tx1"/>
-                </a:solidFill>
-                <a:latin typeface="Arial" panose="020B0604020202020204" pitchFamily="34" charset="0"/>
-                <a:cs typeface="Arial" panose="020B0604020202020204" pitchFamily="34" charset="0"/>
-              </a:rPr>
-              <a:t>Name des Events</a:t>
-            </a:r>
-          </a:p>
-        </p:txBody>
-      </p:sp>
-      <p:sp>
-        <p:nvSpPr>
-          <p:cNvPr id="56" name="Rechteck 55">
-            <a:extLst>
-              <a:ext uri="{FF2B5EF4-FFF2-40B4-BE49-F238E27FC236}">
-                <a16:creationId xmlns:a16="http://schemas.microsoft.com/office/drawing/2014/main" id="{5ACF744A-9AF7-8DEA-BFFA-9C0E9DCD3B8B}"/>
-              </a:ext>
-            </a:extLst>
-          </p:cNvPr>
-          <p:cNvSpPr/>
-          <p:nvPr/>
-        </p:nvSpPr>
-        <p:spPr>
-          <a:xfrm>
-            <a:off x="6391515" y="2613831"/>
-            <a:ext cx="1118000" cy="257375"/>
-          </a:xfrm>
-          <a:prstGeom prst="rect">
-            <a:avLst/>
-          </a:prstGeom>
-          <a:solidFill>
-            <a:schemeClr val="bg1">
-              <a:lumMod val="85000"/>
-            </a:schemeClr>
-          </a:solidFill>
-          <a:ln w="6350">
-            <a:solidFill>
-              <a:schemeClr val="tx1"/>
-            </a:solidFill>
-          </a:ln>
-        </p:spPr>
-        <p:style>
-          <a:lnRef idx="2">
-            <a:schemeClr val="accent1">
-              <a:shade val="15000"/>
-            </a:schemeClr>
-          </a:lnRef>
-          <a:fillRef idx="1">
-            <a:schemeClr val="accent1"/>
-          </a:fillRef>
-          <a:effectRef idx="0">
-            <a:schemeClr val="accent1"/>
-          </a:effectRef>
-          <a:fontRef idx="minor">
-            <a:schemeClr val="lt1"/>
-          </a:fontRef>
-        </p:style>
-        <p:txBody>
-          <a:bodyPr rtlCol="0" anchor="ctr"/>
-          <a:lstStyle/>
-          <a:p>
-            <a:pPr algn="ctr"/>
-            <a:r>
-              <a:rPr lang="de-CH" sz="1600" dirty="0">
-                <a:solidFill>
-                  <a:schemeClr val="tx1"/>
-                </a:solidFill>
-                <a:latin typeface="Arial" panose="020B0604020202020204" pitchFamily="34" charset="0"/>
-                <a:cs typeface="Arial" panose="020B0604020202020204" pitchFamily="34" charset="0"/>
-              </a:rPr>
-              <a:t>Preise</a:t>
-            </a:r>
-          </a:p>
-        </p:txBody>
-      </p:sp>
-      <p:sp>
-        <p:nvSpPr>
-          <p:cNvPr id="57" name="Rechteck 56">
-            <a:extLst>
-              <a:ext uri="{FF2B5EF4-FFF2-40B4-BE49-F238E27FC236}">
-                <a16:creationId xmlns:a16="http://schemas.microsoft.com/office/drawing/2014/main" id="{2C02477B-0C8A-93FF-4E57-A8A35406DDC9}"/>
-              </a:ext>
-            </a:extLst>
-          </p:cNvPr>
-          <p:cNvSpPr/>
-          <p:nvPr/>
-        </p:nvSpPr>
-        <p:spPr>
-          <a:xfrm>
-            <a:off x="7587749" y="2617344"/>
-            <a:ext cx="1403677" cy="289299"/>
-          </a:xfrm>
-          <a:prstGeom prst="rect">
-            <a:avLst/>
-          </a:prstGeom>
-          <a:solidFill>
-            <a:schemeClr val="bg1">
-              <a:lumMod val="85000"/>
-            </a:schemeClr>
-          </a:solidFill>
-          <a:ln w="6350">
-            <a:solidFill>
-              <a:schemeClr val="tx1"/>
-            </a:solidFill>
-          </a:ln>
-        </p:spPr>
-        <p:style>
-          <a:lnRef idx="2">
-            <a:schemeClr val="accent1">
-              <a:shade val="15000"/>
-            </a:schemeClr>
-          </a:lnRef>
-          <a:fillRef idx="1">
-            <a:schemeClr val="accent1"/>
-          </a:fillRef>
-          <a:effectRef idx="0">
-            <a:schemeClr val="accent1"/>
-          </a:effectRef>
-          <a:fontRef idx="minor">
-            <a:schemeClr val="lt1"/>
-          </a:fontRef>
-        </p:style>
-        <p:txBody>
-          <a:bodyPr rtlCol="0" anchor="ctr"/>
-          <a:lstStyle/>
-          <a:p>
-            <a:pPr algn="ctr"/>
-            <a:r>
-              <a:rPr lang="de-CH" sz="1600" dirty="0">
-                <a:solidFill>
-                  <a:schemeClr val="tx1"/>
-                </a:solidFill>
-                <a:latin typeface="Arial" panose="020B0604020202020204" pitchFamily="34" charset="0"/>
-                <a:cs typeface="Arial" panose="020B0604020202020204" pitchFamily="34" charset="0"/>
-              </a:rPr>
-              <a:t>Instruktionen</a:t>
-            </a:r>
-          </a:p>
-        </p:txBody>
-      </p:sp>
-      <p:sp>
-        <p:nvSpPr>
-          <p:cNvPr id="58" name="Rechteck 57">
-            <a:extLst>
-              <a:ext uri="{FF2B5EF4-FFF2-40B4-BE49-F238E27FC236}">
-                <a16:creationId xmlns:a16="http://schemas.microsoft.com/office/drawing/2014/main" id="{CCF8E58B-5D93-F1FE-4478-62CCD5242A36}"/>
-              </a:ext>
-            </a:extLst>
-          </p:cNvPr>
-          <p:cNvSpPr/>
-          <p:nvPr/>
-        </p:nvSpPr>
-        <p:spPr>
-          <a:xfrm>
-            <a:off x="9049893" y="2602059"/>
-            <a:ext cx="1403677" cy="328221"/>
-          </a:xfrm>
-          <a:prstGeom prst="rect">
-            <a:avLst/>
-          </a:prstGeom>
-          <a:solidFill>
-            <a:schemeClr val="bg1">
-              <a:lumMod val="85000"/>
-            </a:schemeClr>
-          </a:solidFill>
-          <a:ln w="6350">
-            <a:solidFill>
-              <a:schemeClr val="tx1"/>
-            </a:solidFill>
-          </a:ln>
-        </p:spPr>
-        <p:style>
-          <a:lnRef idx="2">
-            <a:schemeClr val="accent1">
-              <a:shade val="15000"/>
-            </a:schemeClr>
-          </a:lnRef>
-          <a:fillRef idx="1">
-            <a:schemeClr val="accent1"/>
-          </a:fillRef>
-          <a:effectRef idx="0">
-            <a:schemeClr val="accent1"/>
-          </a:effectRef>
-          <a:fontRef idx="minor">
-            <a:schemeClr val="lt1"/>
-          </a:fontRef>
-        </p:style>
-        <p:txBody>
-          <a:bodyPr rtlCol="0" anchor="ctr"/>
-          <a:lstStyle/>
-          <a:p>
-            <a:pPr algn="ctr"/>
-            <a:r>
-              <a:rPr lang="de-CH" sz="1600" dirty="0">
-                <a:solidFill>
-                  <a:schemeClr val="tx1"/>
-                </a:solidFill>
-                <a:latin typeface="Arial" panose="020B0604020202020204" pitchFamily="34" charset="0"/>
-                <a:cs typeface="Arial" panose="020B0604020202020204" pitchFamily="34" charset="0"/>
-              </a:rPr>
-              <a:t>Adresse</a:t>
-            </a:r>
-          </a:p>
-        </p:txBody>
-      </p:sp>
-      <p:sp>
-        <p:nvSpPr>
-          <p:cNvPr id="59" name="Rechteck 58">
-            <a:extLst>
-              <a:ext uri="{FF2B5EF4-FFF2-40B4-BE49-F238E27FC236}">
-                <a16:creationId xmlns:a16="http://schemas.microsoft.com/office/drawing/2014/main" id="{F3184267-A7E6-AA3F-DA8D-5257E8090620}"/>
-              </a:ext>
-            </a:extLst>
-          </p:cNvPr>
-          <p:cNvSpPr/>
-          <p:nvPr/>
-        </p:nvSpPr>
-        <p:spPr>
-          <a:xfrm>
-            <a:off x="6391514" y="3305657"/>
-            <a:ext cx="1739609" cy="289298"/>
-          </a:xfrm>
-          <a:prstGeom prst="rect">
-            <a:avLst/>
-          </a:prstGeom>
-          <a:noFill/>
-          <a:ln w="6350">
-            <a:solidFill>
-              <a:schemeClr val="tx1"/>
-            </a:solidFill>
-          </a:ln>
-        </p:spPr>
-        <p:style>
-          <a:lnRef idx="2">
-            <a:schemeClr val="accent1">
-              <a:shade val="15000"/>
-            </a:schemeClr>
-          </a:lnRef>
-          <a:fillRef idx="1">
-            <a:schemeClr val="accent1"/>
-          </a:fillRef>
-          <a:effectRef idx="0">
-            <a:schemeClr val="accent1"/>
-          </a:effectRef>
-          <a:fontRef idx="minor">
-            <a:schemeClr val="lt1"/>
-          </a:fontRef>
-        </p:style>
-        <p:txBody>
-          <a:bodyPr rtlCol="0" anchor="ctr"/>
-          <a:lstStyle/>
-          <a:p>
-            <a:r>
-              <a:rPr lang="de-CH" sz="1600" dirty="0">
-                <a:solidFill>
-                  <a:schemeClr val="tx1"/>
-                </a:solidFill>
-                <a:latin typeface="Arial" panose="020B0604020202020204" pitchFamily="34" charset="0"/>
-                <a:cs typeface="Arial" panose="020B0604020202020204" pitchFamily="34" charset="0"/>
-              </a:rPr>
-              <a:t>E-Mail Absender</a:t>
-            </a:r>
-          </a:p>
-        </p:txBody>
-      </p:sp>
-      <p:sp>
-        <p:nvSpPr>
-          <p:cNvPr id="60" name="Rechteck 59">
-            <a:extLst>
-              <a:ext uri="{FF2B5EF4-FFF2-40B4-BE49-F238E27FC236}">
-                <a16:creationId xmlns:a16="http://schemas.microsoft.com/office/drawing/2014/main" id="{4C0C2847-28DD-3DEB-0B4D-BF69001C0A60}"/>
-              </a:ext>
-            </a:extLst>
-          </p:cNvPr>
-          <p:cNvSpPr/>
-          <p:nvPr/>
-        </p:nvSpPr>
-        <p:spPr>
-          <a:xfrm>
-            <a:off x="6391513" y="3665006"/>
-            <a:ext cx="1739609" cy="289298"/>
-          </a:xfrm>
-          <a:prstGeom prst="rect">
-            <a:avLst/>
-          </a:prstGeom>
-          <a:noFill/>
-          <a:ln w="6350">
-            <a:solidFill>
-              <a:schemeClr val="tx1"/>
-            </a:solidFill>
-          </a:ln>
-        </p:spPr>
-        <p:style>
-          <a:lnRef idx="2">
-            <a:schemeClr val="accent1">
-              <a:shade val="15000"/>
-            </a:schemeClr>
-          </a:lnRef>
-          <a:fillRef idx="1">
-            <a:schemeClr val="accent1"/>
-          </a:fillRef>
-          <a:effectRef idx="0">
-            <a:schemeClr val="accent1"/>
-          </a:effectRef>
-          <a:fontRef idx="minor">
-            <a:schemeClr val="lt1"/>
-          </a:fontRef>
-        </p:style>
-        <p:txBody>
-          <a:bodyPr rtlCol="0" anchor="ctr"/>
-          <a:lstStyle/>
-          <a:p>
-            <a:r>
-              <a:rPr lang="de-CH" sz="1600" dirty="0">
-                <a:solidFill>
-                  <a:schemeClr val="tx1"/>
-                </a:solidFill>
-                <a:latin typeface="Arial" panose="020B0604020202020204" pitchFamily="34" charset="0"/>
-                <a:cs typeface="Arial" panose="020B0604020202020204" pitchFamily="34" charset="0"/>
-              </a:rPr>
-              <a:t>E-Mail Betreff</a:t>
-            </a:r>
-          </a:p>
-        </p:txBody>
-      </p:sp>
-      <p:sp>
-        <p:nvSpPr>
-          <p:cNvPr id="61" name="Rechteck 60">
-            <a:extLst>
-              <a:ext uri="{FF2B5EF4-FFF2-40B4-BE49-F238E27FC236}">
-                <a16:creationId xmlns:a16="http://schemas.microsoft.com/office/drawing/2014/main" id="{813B607C-CBF1-3900-E4AE-E90E4373EA16}"/>
-              </a:ext>
-            </a:extLst>
-          </p:cNvPr>
-          <p:cNvSpPr/>
-          <p:nvPr/>
-        </p:nvSpPr>
-        <p:spPr>
-          <a:xfrm>
-            <a:off x="8289587" y="3675224"/>
-            <a:ext cx="1643138" cy="289299"/>
-          </a:xfrm>
-          <a:prstGeom prst="rect">
-            <a:avLst/>
-          </a:prstGeom>
-          <a:solidFill>
-            <a:schemeClr val="bg1">
-              <a:lumMod val="85000"/>
-            </a:schemeClr>
-          </a:solidFill>
-          <a:ln w="6350">
-            <a:solidFill>
-              <a:schemeClr val="tx1"/>
-            </a:solidFill>
-          </a:ln>
-        </p:spPr>
-        <p:style>
-          <a:lnRef idx="2">
-            <a:schemeClr val="accent1">
-              <a:shade val="15000"/>
-            </a:schemeClr>
-          </a:lnRef>
-          <a:fillRef idx="1">
-            <a:schemeClr val="accent1"/>
-          </a:fillRef>
-          <a:effectRef idx="0">
-            <a:schemeClr val="accent1"/>
-          </a:effectRef>
-          <a:fontRef idx="minor">
-            <a:schemeClr val="lt1"/>
-          </a:fontRef>
-        </p:style>
-        <p:txBody>
-          <a:bodyPr rtlCol="0" anchor="ctr"/>
-          <a:lstStyle/>
-          <a:p>
-            <a:pPr algn="ctr"/>
-            <a:r>
-              <a:rPr lang="de-CH" sz="1600" dirty="0">
-                <a:solidFill>
-                  <a:schemeClr val="tx1"/>
-                </a:solidFill>
-                <a:latin typeface="Arial" panose="020B0604020202020204" pitchFamily="34" charset="0"/>
-                <a:cs typeface="Arial" panose="020B0604020202020204" pitchFamily="34" charset="0"/>
-              </a:rPr>
-              <a:t>E-Mail Inhalt</a:t>
-            </a:r>
-          </a:p>
-        </p:txBody>
-      </p:sp>
-      <p:sp>
-        <p:nvSpPr>
-          <p:cNvPr id="62" name="Rechteck 61">
-            <a:extLst>
-              <a:ext uri="{FF2B5EF4-FFF2-40B4-BE49-F238E27FC236}">
-                <a16:creationId xmlns:a16="http://schemas.microsoft.com/office/drawing/2014/main" id="{3FC18E43-162B-2418-FD06-3AADD2E548DA}"/>
-              </a:ext>
-            </a:extLst>
-          </p:cNvPr>
-          <p:cNvSpPr/>
-          <p:nvPr/>
-        </p:nvSpPr>
-        <p:spPr>
-          <a:xfrm>
-            <a:off x="10503597" y="2613831"/>
-            <a:ext cx="1487582" cy="335740"/>
-          </a:xfrm>
-          <a:prstGeom prst="rect">
-            <a:avLst/>
-          </a:prstGeom>
-          <a:solidFill>
-            <a:schemeClr val="bg1">
-              <a:lumMod val="85000"/>
-            </a:schemeClr>
-          </a:solidFill>
-          <a:ln w="6350">
-            <a:solidFill>
-              <a:schemeClr val="tx1"/>
-            </a:solidFill>
-          </a:ln>
-        </p:spPr>
-        <p:style>
-          <a:lnRef idx="2">
-            <a:schemeClr val="accent1">
-              <a:shade val="15000"/>
-            </a:schemeClr>
-          </a:lnRef>
-          <a:fillRef idx="1">
-            <a:schemeClr val="accent1"/>
-          </a:fillRef>
-          <a:effectRef idx="0">
-            <a:schemeClr val="accent1"/>
-          </a:effectRef>
-          <a:fontRef idx="minor">
-            <a:schemeClr val="lt1"/>
-          </a:fontRef>
-        </p:style>
-        <p:txBody>
-          <a:bodyPr rtlCol="0" anchor="ctr"/>
-          <a:lstStyle/>
-          <a:p>
-            <a:pPr algn="ctr"/>
-            <a:r>
-              <a:rPr lang="de-CH" sz="1600" dirty="0">
-                <a:solidFill>
-                  <a:schemeClr val="tx1"/>
-                </a:solidFill>
-                <a:latin typeface="Arial" panose="020B0604020202020204" pitchFamily="34" charset="0"/>
-                <a:cs typeface="Arial" panose="020B0604020202020204" pitchFamily="34" charset="0"/>
-              </a:rPr>
-              <a:t>Beschreibung</a:t>
-            </a:r>
-          </a:p>
-        </p:txBody>
-      </p:sp>
-      <p:sp>
-        <p:nvSpPr>
-          <p:cNvPr id="63" name="Rechteck 62">
-            <a:extLst>
-              <a:ext uri="{FF2B5EF4-FFF2-40B4-BE49-F238E27FC236}">
-                <a16:creationId xmlns:a16="http://schemas.microsoft.com/office/drawing/2014/main" id="{775382C2-78CD-883E-7C44-8913F55C9051}"/>
-              </a:ext>
-            </a:extLst>
-          </p:cNvPr>
-          <p:cNvSpPr/>
-          <p:nvPr/>
-        </p:nvSpPr>
-        <p:spPr>
-          <a:xfrm>
-            <a:off x="10214999" y="3302559"/>
-            <a:ext cx="1663725" cy="328221"/>
-          </a:xfrm>
-          <a:prstGeom prst="rect">
-            <a:avLst/>
-          </a:prstGeom>
-          <a:solidFill>
-            <a:schemeClr val="bg1">
-              <a:lumMod val="85000"/>
-            </a:schemeClr>
-          </a:solidFill>
-          <a:ln w="6350">
-            <a:solidFill>
-              <a:schemeClr val="tx1"/>
-            </a:solidFill>
-          </a:ln>
-        </p:spPr>
-        <p:style>
-          <a:lnRef idx="2">
-            <a:schemeClr val="accent1">
-              <a:shade val="15000"/>
-            </a:schemeClr>
-          </a:lnRef>
-          <a:fillRef idx="1">
-            <a:schemeClr val="accent1"/>
-          </a:fillRef>
-          <a:effectRef idx="0">
-            <a:schemeClr val="accent1"/>
-          </a:effectRef>
-          <a:fontRef idx="minor">
-            <a:schemeClr val="lt1"/>
-          </a:fontRef>
-        </p:style>
-        <p:txBody>
-          <a:bodyPr rtlCol="0" anchor="ctr"/>
-          <a:lstStyle/>
-          <a:p>
-            <a:pPr algn="ctr"/>
-            <a:r>
-              <a:rPr lang="de-CH" sz="1600" dirty="0">
-                <a:solidFill>
-                  <a:schemeClr val="tx1"/>
-                </a:solidFill>
-                <a:latin typeface="Arial" panose="020B0604020202020204" pitchFamily="34" charset="0"/>
-                <a:cs typeface="Arial" panose="020B0604020202020204" pitchFamily="34" charset="0"/>
-              </a:rPr>
-              <a:t>Zahlungsmittel</a:t>
-            </a:r>
-          </a:p>
-        </p:txBody>
-      </p:sp>
-      <p:sp>
-        <p:nvSpPr>
-          <p:cNvPr id="1024" name="Rechteck 1023">
-            <a:extLst>
-              <a:ext uri="{FF2B5EF4-FFF2-40B4-BE49-F238E27FC236}">
-                <a16:creationId xmlns:a16="http://schemas.microsoft.com/office/drawing/2014/main" id="{91A21D44-218C-B647-24FE-ABFF6F9554F6}"/>
-              </a:ext>
-            </a:extLst>
-          </p:cNvPr>
-          <p:cNvSpPr/>
-          <p:nvPr/>
-        </p:nvSpPr>
-        <p:spPr>
-          <a:xfrm>
-            <a:off x="6349055" y="4004338"/>
-            <a:ext cx="1739609" cy="289298"/>
-          </a:xfrm>
-          <a:prstGeom prst="rect">
-            <a:avLst/>
-          </a:prstGeom>
-          <a:noFill/>
-          <a:ln w="6350">
-            <a:noFill/>
-          </a:ln>
-        </p:spPr>
-        <p:style>
-          <a:lnRef idx="2">
-            <a:schemeClr val="accent1">
-              <a:shade val="15000"/>
-            </a:schemeClr>
-          </a:lnRef>
-          <a:fillRef idx="1">
-            <a:schemeClr val="accent1"/>
-          </a:fillRef>
-          <a:effectRef idx="0">
-            <a:schemeClr val="accent1"/>
-          </a:effectRef>
-          <a:fontRef idx="minor">
-            <a:schemeClr val="lt1"/>
-          </a:fontRef>
-        </p:style>
-        <p:txBody>
-          <a:bodyPr rtlCol="0" anchor="ctr"/>
-          <a:lstStyle/>
-          <a:p>
-            <a:r>
-              <a:rPr lang="de-CH" sz="1600" dirty="0">
-                <a:solidFill>
-                  <a:schemeClr val="tx1"/>
-                </a:solidFill>
-                <a:latin typeface="Arial" panose="020B0604020202020204" pitchFamily="34" charset="0"/>
-                <a:cs typeface="Arial" panose="020B0604020202020204" pitchFamily="34" charset="0"/>
-              </a:rPr>
-              <a:t>Event abgesagt</a:t>
-            </a:r>
-          </a:p>
-        </p:txBody>
-      </p:sp>
-      <p:sp>
-        <p:nvSpPr>
-          <p:cNvPr id="1025" name="Rechteck 1024">
-            <a:extLst>
-              <a:ext uri="{FF2B5EF4-FFF2-40B4-BE49-F238E27FC236}">
-                <a16:creationId xmlns:a16="http://schemas.microsoft.com/office/drawing/2014/main" id="{1E5E5C3B-50BB-9320-40F9-5BE85B58AA31}"/>
-              </a:ext>
-            </a:extLst>
-          </p:cNvPr>
-          <p:cNvSpPr/>
-          <p:nvPr/>
-        </p:nvSpPr>
-        <p:spPr>
-          <a:xfrm>
-            <a:off x="7956171" y="4028213"/>
-            <a:ext cx="360349" cy="289298"/>
-          </a:xfrm>
-          <a:prstGeom prst="rect">
-            <a:avLst/>
-          </a:prstGeom>
-          <a:noFill/>
-          <a:ln w="19050">
-            <a:solidFill>
-              <a:schemeClr val="tx1"/>
-            </a:solidFill>
-          </a:ln>
-        </p:spPr>
-        <p:style>
-          <a:lnRef idx="2">
-            <a:schemeClr val="accent1">
-              <a:shade val="15000"/>
-            </a:schemeClr>
-          </a:lnRef>
-          <a:fillRef idx="1">
-            <a:schemeClr val="accent1"/>
-          </a:fillRef>
-          <a:effectRef idx="0">
-            <a:schemeClr val="accent1"/>
-          </a:effectRef>
-          <a:fontRef idx="minor">
-            <a:schemeClr val="lt1"/>
-          </a:fontRef>
-        </p:style>
-        <p:txBody>
-          <a:bodyPr rtlCol="0" anchor="ctr"/>
-          <a:lstStyle/>
-          <a:p>
-            <a:endParaRPr lang="de-CH" sz="1600" dirty="0">
-              <a:solidFill>
-                <a:schemeClr val="tx1"/>
-              </a:solidFill>
-              <a:latin typeface="Arial" panose="020B0604020202020204" pitchFamily="34" charset="0"/>
-              <a:cs typeface="Arial" panose="020B0604020202020204" pitchFamily="34" charset="0"/>
-            </a:endParaRPr>
-          </a:p>
-        </p:txBody>
-      </p:sp>
-      <p:sp>
-        <p:nvSpPr>
-          <p:cNvPr id="1027" name="Rechteck 1026">
-            <a:extLst>
-              <a:ext uri="{FF2B5EF4-FFF2-40B4-BE49-F238E27FC236}">
-                <a16:creationId xmlns:a16="http://schemas.microsoft.com/office/drawing/2014/main" id="{E69695F3-82D3-BB18-56DE-0E1FEF4C10D1}"/>
-              </a:ext>
-            </a:extLst>
-          </p:cNvPr>
-          <p:cNvSpPr/>
-          <p:nvPr/>
-        </p:nvSpPr>
-        <p:spPr>
-          <a:xfrm>
-            <a:off x="8484110" y="4028213"/>
-            <a:ext cx="3394613" cy="289298"/>
-          </a:xfrm>
-          <a:prstGeom prst="rect">
-            <a:avLst/>
-          </a:prstGeom>
-          <a:noFill/>
-          <a:ln w="6350">
-            <a:solidFill>
-              <a:schemeClr val="tx1"/>
-            </a:solidFill>
-          </a:ln>
-        </p:spPr>
-        <p:style>
-          <a:lnRef idx="2">
-            <a:schemeClr val="accent1">
-              <a:shade val="15000"/>
-            </a:schemeClr>
-          </a:lnRef>
-          <a:fillRef idx="1">
-            <a:schemeClr val="accent1"/>
-          </a:fillRef>
-          <a:effectRef idx="0">
-            <a:schemeClr val="accent1"/>
-          </a:effectRef>
-          <a:fontRef idx="minor">
-            <a:schemeClr val="lt1"/>
-          </a:fontRef>
-        </p:style>
-        <p:txBody>
-          <a:bodyPr rtlCol="0" anchor="ctr"/>
-          <a:lstStyle/>
-          <a:p>
-            <a:r>
-              <a:rPr lang="de-CH" sz="1600" dirty="0">
-                <a:solidFill>
-                  <a:schemeClr val="tx1"/>
-                </a:solidFill>
-                <a:latin typeface="Arial" panose="020B0604020202020204" pitchFamily="34" charset="0"/>
-                <a:cs typeface="Arial" panose="020B0604020202020204" pitchFamily="34" charset="0"/>
-              </a:rPr>
-              <a:t>Grund</a:t>
-            </a:r>
-          </a:p>
-        </p:txBody>
-      </p:sp>
-      <p:sp>
-        <p:nvSpPr>
-          <p:cNvPr id="1028" name="Rechteck 1027">
-            <a:extLst>
-              <a:ext uri="{FF2B5EF4-FFF2-40B4-BE49-F238E27FC236}">
-                <a16:creationId xmlns:a16="http://schemas.microsoft.com/office/drawing/2014/main" id="{D7673D6D-AC84-B99A-9949-25CAB67F8ECE}"/>
-              </a:ext>
-            </a:extLst>
-          </p:cNvPr>
-          <p:cNvSpPr/>
-          <p:nvPr/>
-        </p:nvSpPr>
-        <p:spPr>
-          <a:xfrm>
-            <a:off x="10649521" y="4473931"/>
-            <a:ext cx="1341658" cy="289298"/>
-          </a:xfrm>
-          <a:prstGeom prst="rect">
-            <a:avLst/>
-          </a:prstGeom>
-          <a:solidFill>
-            <a:schemeClr val="bg1">
-              <a:lumMod val="85000"/>
-            </a:schemeClr>
-          </a:solidFill>
-          <a:ln w="6350">
-            <a:solidFill>
-              <a:schemeClr val="tx1"/>
-            </a:solidFill>
-          </a:ln>
-        </p:spPr>
-        <p:style>
-          <a:lnRef idx="2">
-            <a:schemeClr val="accent1">
-              <a:shade val="15000"/>
-            </a:schemeClr>
-          </a:lnRef>
-          <a:fillRef idx="1">
-            <a:schemeClr val="accent1"/>
-          </a:fillRef>
-          <a:effectRef idx="0">
-            <a:schemeClr val="accent1"/>
-          </a:effectRef>
-          <a:fontRef idx="minor">
-            <a:schemeClr val="lt1"/>
-          </a:fontRef>
-        </p:style>
-        <p:txBody>
-          <a:bodyPr rtlCol="0" anchor="ctr"/>
-          <a:lstStyle/>
-          <a:p>
-            <a:pPr algn="ctr"/>
-            <a:r>
-              <a:rPr lang="de-CH" dirty="0">
-                <a:solidFill>
-                  <a:schemeClr val="tx1"/>
-                </a:solidFill>
-                <a:latin typeface="Arial" panose="020B0604020202020204" pitchFamily="34" charset="0"/>
-                <a:cs typeface="Arial" panose="020B0604020202020204" pitchFamily="34" charset="0"/>
-              </a:rPr>
-              <a:t>Speichern</a:t>
-            </a:r>
-          </a:p>
-        </p:txBody>
-      </p:sp>
-      <p:sp>
-        <p:nvSpPr>
-          <p:cNvPr id="1029" name="Rechteck 1028">
-            <a:extLst>
-              <a:ext uri="{FF2B5EF4-FFF2-40B4-BE49-F238E27FC236}">
-                <a16:creationId xmlns:a16="http://schemas.microsoft.com/office/drawing/2014/main" id="{FBD295C6-32F7-B1DC-8D3C-FF1673AEB748}"/>
-              </a:ext>
-            </a:extLst>
-          </p:cNvPr>
-          <p:cNvSpPr/>
-          <p:nvPr/>
-        </p:nvSpPr>
-        <p:spPr>
-          <a:xfrm>
-            <a:off x="8484111" y="4473931"/>
-            <a:ext cx="1507999" cy="289298"/>
-          </a:xfrm>
-          <a:prstGeom prst="rect">
-            <a:avLst/>
-          </a:prstGeom>
-          <a:solidFill>
-            <a:schemeClr val="bg1">
-              <a:lumMod val="85000"/>
-            </a:schemeClr>
-          </a:solidFill>
-          <a:ln w="6350">
-            <a:solidFill>
-              <a:schemeClr val="tx1"/>
-            </a:solidFill>
-          </a:ln>
-        </p:spPr>
-        <p:style>
-          <a:lnRef idx="2">
-            <a:schemeClr val="accent1">
-              <a:shade val="15000"/>
-            </a:schemeClr>
-          </a:lnRef>
-          <a:fillRef idx="1">
-            <a:schemeClr val="accent1"/>
-          </a:fillRef>
-          <a:effectRef idx="0">
-            <a:schemeClr val="accent1"/>
-          </a:effectRef>
-          <a:fontRef idx="minor">
-            <a:schemeClr val="lt1"/>
-          </a:fontRef>
-        </p:style>
-        <p:txBody>
-          <a:bodyPr rtlCol="0" anchor="ctr"/>
-          <a:lstStyle/>
-          <a:p>
-            <a:pPr algn="ctr"/>
-            <a:r>
-              <a:rPr lang="de-CH" dirty="0">
-                <a:solidFill>
-                  <a:schemeClr val="tx1"/>
-                </a:solidFill>
-                <a:latin typeface="Arial" panose="020B0604020202020204" pitchFamily="34" charset="0"/>
-                <a:cs typeface="Arial" panose="020B0604020202020204" pitchFamily="34" charset="0"/>
-              </a:rPr>
-              <a:t>Abbrechen</a:t>
-            </a:r>
-          </a:p>
-        </p:txBody>
-      </p:sp>
-      <p:sp>
-        <p:nvSpPr>
-          <p:cNvPr id="1030" name="Rechteck 1029">
-            <a:extLst>
-              <a:ext uri="{FF2B5EF4-FFF2-40B4-BE49-F238E27FC236}">
-                <a16:creationId xmlns:a16="http://schemas.microsoft.com/office/drawing/2014/main" id="{4C7C1E8E-D81A-AC53-E97D-39B7F535C0BC}"/>
-              </a:ext>
-            </a:extLst>
-          </p:cNvPr>
-          <p:cNvSpPr/>
-          <p:nvPr/>
-        </p:nvSpPr>
-        <p:spPr>
-          <a:xfrm>
-            <a:off x="8303256" y="3322636"/>
-            <a:ext cx="1629469" cy="289298"/>
-          </a:xfrm>
-          <a:prstGeom prst="rect">
-            <a:avLst/>
-          </a:prstGeom>
-          <a:noFill/>
-          <a:ln w="6350">
-            <a:solidFill>
-              <a:schemeClr val="tx1"/>
-            </a:solidFill>
-          </a:ln>
-        </p:spPr>
-        <p:style>
-          <a:lnRef idx="2">
-            <a:schemeClr val="accent1">
-              <a:shade val="15000"/>
-            </a:schemeClr>
-          </a:lnRef>
-          <a:fillRef idx="1">
-            <a:schemeClr val="accent1"/>
-          </a:fillRef>
-          <a:effectRef idx="0">
-            <a:schemeClr val="accent1"/>
-          </a:effectRef>
-          <a:fontRef idx="minor">
-            <a:schemeClr val="lt1"/>
-          </a:fontRef>
-        </p:style>
-        <p:txBody>
-          <a:bodyPr rtlCol="0" anchor="ctr"/>
-          <a:lstStyle/>
-          <a:p>
-            <a:r>
-              <a:rPr lang="de-CH" sz="1600" dirty="0">
-                <a:solidFill>
-                  <a:schemeClr val="tx1"/>
-                </a:solidFill>
-                <a:latin typeface="Arial" panose="020B0604020202020204" pitchFamily="34" charset="0"/>
-                <a:cs typeface="Arial" panose="020B0604020202020204" pitchFamily="34" charset="0"/>
-              </a:rPr>
-              <a:t>E-Mail Titel</a:t>
-            </a:r>
-          </a:p>
-        </p:txBody>
-      </p:sp>
     </p:spTree>
     <p:extLst>
       <p:ext uri="{BB962C8B-B14F-4D97-AF65-F5344CB8AC3E}">
@@ -5399,349 +3118,6 @@
           <a:chExt cx="0" cy="0"/>
         </a:xfrm>
       </p:grpSpPr>
-      <p:sp>
-        <p:nvSpPr>
-          <p:cNvPr id="2" name="Rechteck 1">
-            <a:extLst>
-              <a:ext uri="{FF2B5EF4-FFF2-40B4-BE49-F238E27FC236}">
-                <a16:creationId xmlns:a16="http://schemas.microsoft.com/office/drawing/2014/main" id="{894B8FEE-19F2-9552-B031-8901C0EA71FE}"/>
-              </a:ext>
-            </a:extLst>
-          </p:cNvPr>
-          <p:cNvSpPr/>
-          <p:nvPr/>
-        </p:nvSpPr>
-        <p:spPr>
-          <a:xfrm>
-            <a:off x="3640427" y="856146"/>
-            <a:ext cx="6004140" cy="3882492"/>
-          </a:xfrm>
-          <a:prstGeom prst="rect">
-            <a:avLst/>
-          </a:prstGeom>
-          <a:noFill/>
-          <a:ln w="22225">
-            <a:solidFill>
-              <a:schemeClr val="accent1"/>
-            </a:solidFill>
-          </a:ln>
-        </p:spPr>
-        <p:style>
-          <a:lnRef idx="2">
-            <a:schemeClr val="accent1">
-              <a:shade val="15000"/>
-            </a:schemeClr>
-          </a:lnRef>
-          <a:fillRef idx="1">
-            <a:schemeClr val="accent1"/>
-          </a:fillRef>
-          <a:effectRef idx="0">
-            <a:schemeClr val="accent1"/>
-          </a:effectRef>
-          <a:fontRef idx="minor">
-            <a:schemeClr val="lt1"/>
-          </a:fontRef>
-        </p:style>
-        <p:txBody>
-          <a:bodyPr rtlCol="0" anchor="ctr"/>
-          <a:lstStyle/>
-          <a:p>
-            <a:pPr algn="ctr"/>
-            <a:endParaRPr lang="de-CH"/>
-          </a:p>
-        </p:txBody>
-      </p:sp>
-      <p:sp>
-        <p:nvSpPr>
-          <p:cNvPr id="3" name="Textfeld 2">
-            <a:extLst>
-              <a:ext uri="{FF2B5EF4-FFF2-40B4-BE49-F238E27FC236}">
-                <a16:creationId xmlns:a16="http://schemas.microsoft.com/office/drawing/2014/main" id="{4B8BADA7-12C0-52CA-D6CB-59B5F9C96230}"/>
-              </a:ext>
-            </a:extLst>
-          </p:cNvPr>
-          <p:cNvSpPr txBox="1"/>
-          <p:nvPr/>
-        </p:nvSpPr>
-        <p:spPr>
-          <a:xfrm>
-            <a:off x="3709841" y="969328"/>
-            <a:ext cx="4670366" cy="369332"/>
-          </a:xfrm>
-          <a:prstGeom prst="rect">
-            <a:avLst/>
-          </a:prstGeom>
-          <a:noFill/>
-        </p:spPr>
-        <p:txBody>
-          <a:bodyPr wrap="square" rtlCol="0">
-            <a:spAutoFit/>
-          </a:bodyPr>
-          <a:lstStyle/>
-          <a:p>
-            <a:r>
-              <a:rPr lang="de-CH" b="1" dirty="0">
-                <a:latin typeface="Arial" panose="020B0604020202020204" pitchFamily="34" charset="0"/>
-                <a:cs typeface="Arial" panose="020B0604020202020204" pitchFamily="34" charset="0"/>
-              </a:rPr>
-              <a:t>5. Text eingeben </a:t>
-            </a:r>
-          </a:p>
-        </p:txBody>
-      </p:sp>
-      <p:sp>
-        <p:nvSpPr>
-          <p:cNvPr id="4" name="Rechteck 3">
-            <a:extLst>
-              <a:ext uri="{FF2B5EF4-FFF2-40B4-BE49-F238E27FC236}">
-                <a16:creationId xmlns:a16="http://schemas.microsoft.com/office/drawing/2014/main" id="{A3499332-D0B5-6908-99E1-85DEA2840D2C}"/>
-              </a:ext>
-            </a:extLst>
-          </p:cNvPr>
-          <p:cNvSpPr/>
-          <p:nvPr/>
-        </p:nvSpPr>
-        <p:spPr>
-          <a:xfrm>
-            <a:off x="3831194" y="1451842"/>
-            <a:ext cx="5689324" cy="2766980"/>
-          </a:xfrm>
-          <a:prstGeom prst="rect">
-            <a:avLst/>
-          </a:prstGeom>
-          <a:noFill/>
-          <a:ln w="6350">
-            <a:solidFill>
-              <a:schemeClr val="tx1"/>
-            </a:solidFill>
-          </a:ln>
-        </p:spPr>
-        <p:style>
-          <a:lnRef idx="2">
-            <a:schemeClr val="accent1">
-              <a:shade val="15000"/>
-            </a:schemeClr>
-          </a:lnRef>
-          <a:fillRef idx="1">
-            <a:schemeClr val="accent1"/>
-          </a:fillRef>
-          <a:effectRef idx="0">
-            <a:schemeClr val="accent1"/>
-          </a:effectRef>
-          <a:fontRef idx="minor">
-            <a:schemeClr val="lt1"/>
-          </a:fontRef>
-        </p:style>
-        <p:txBody>
-          <a:bodyPr rtlCol="0" anchor="ctr"/>
-          <a:lstStyle/>
-          <a:p>
-            <a:r>
-              <a:rPr lang="de-CH" sz="1600" dirty="0">
-                <a:solidFill>
-                  <a:schemeClr val="tx1"/>
-                </a:solidFill>
-                <a:latin typeface="Arial" panose="020B0604020202020204" pitchFamily="34" charset="0"/>
-                <a:cs typeface="Arial" panose="020B0604020202020204" pitchFamily="34" charset="0"/>
-              </a:rPr>
-              <a:t>Text ……</a:t>
-            </a:r>
-          </a:p>
-          <a:p>
-            <a:endParaRPr lang="de-CH" sz="1600" dirty="0">
-              <a:solidFill>
-                <a:schemeClr val="tx1"/>
-              </a:solidFill>
-              <a:latin typeface="Arial" panose="020B0604020202020204" pitchFamily="34" charset="0"/>
-              <a:cs typeface="Arial" panose="020B0604020202020204" pitchFamily="34" charset="0"/>
-            </a:endParaRPr>
-          </a:p>
-          <a:p>
-            <a:endParaRPr lang="de-CH" sz="1600" dirty="0">
-              <a:solidFill>
-                <a:schemeClr val="tx1"/>
-              </a:solidFill>
-              <a:latin typeface="Arial" panose="020B0604020202020204" pitchFamily="34" charset="0"/>
-              <a:cs typeface="Arial" panose="020B0604020202020204" pitchFamily="34" charset="0"/>
-            </a:endParaRPr>
-          </a:p>
-          <a:p>
-            <a:endParaRPr lang="de-CH" sz="1600" dirty="0">
-              <a:solidFill>
-                <a:schemeClr val="tx1"/>
-              </a:solidFill>
-              <a:latin typeface="Arial" panose="020B0604020202020204" pitchFamily="34" charset="0"/>
-              <a:cs typeface="Arial" panose="020B0604020202020204" pitchFamily="34" charset="0"/>
-            </a:endParaRPr>
-          </a:p>
-          <a:p>
-            <a:endParaRPr lang="de-CH" sz="1600" dirty="0">
-              <a:solidFill>
-                <a:schemeClr val="tx1"/>
-              </a:solidFill>
-              <a:latin typeface="Arial" panose="020B0604020202020204" pitchFamily="34" charset="0"/>
-              <a:cs typeface="Arial" panose="020B0604020202020204" pitchFamily="34" charset="0"/>
-            </a:endParaRPr>
-          </a:p>
-          <a:p>
-            <a:endParaRPr lang="de-CH" sz="1600" dirty="0">
-              <a:solidFill>
-                <a:schemeClr val="tx1"/>
-              </a:solidFill>
-              <a:latin typeface="Arial" panose="020B0604020202020204" pitchFamily="34" charset="0"/>
-              <a:cs typeface="Arial" panose="020B0604020202020204" pitchFamily="34" charset="0"/>
-            </a:endParaRPr>
-          </a:p>
-          <a:p>
-            <a:endParaRPr lang="de-CH" sz="1600" dirty="0">
-              <a:solidFill>
-                <a:schemeClr val="tx1"/>
-              </a:solidFill>
-              <a:latin typeface="Arial" panose="020B0604020202020204" pitchFamily="34" charset="0"/>
-              <a:cs typeface="Arial" panose="020B0604020202020204" pitchFamily="34" charset="0"/>
-            </a:endParaRPr>
-          </a:p>
-          <a:p>
-            <a:endParaRPr lang="de-CH" sz="1600" dirty="0">
-              <a:solidFill>
-                <a:schemeClr val="tx1"/>
-              </a:solidFill>
-              <a:latin typeface="Arial" panose="020B0604020202020204" pitchFamily="34" charset="0"/>
-              <a:cs typeface="Arial" panose="020B0604020202020204" pitchFamily="34" charset="0"/>
-            </a:endParaRPr>
-          </a:p>
-        </p:txBody>
-      </p:sp>
-      <p:sp>
-        <p:nvSpPr>
-          <p:cNvPr id="5" name="Rechteck 4">
-            <a:extLst>
-              <a:ext uri="{FF2B5EF4-FFF2-40B4-BE49-F238E27FC236}">
-                <a16:creationId xmlns:a16="http://schemas.microsoft.com/office/drawing/2014/main" id="{4165A0F7-A6E6-7FD4-5889-29C2C2B33D82}"/>
-              </a:ext>
-            </a:extLst>
-          </p:cNvPr>
-          <p:cNvSpPr/>
-          <p:nvPr/>
-        </p:nvSpPr>
-        <p:spPr>
-          <a:xfrm>
-            <a:off x="7853082" y="4334081"/>
-            <a:ext cx="1599292" cy="289298"/>
-          </a:xfrm>
-          <a:prstGeom prst="rect">
-            <a:avLst/>
-          </a:prstGeom>
-          <a:solidFill>
-            <a:schemeClr val="bg1">
-              <a:lumMod val="85000"/>
-            </a:schemeClr>
-          </a:solidFill>
-          <a:ln w="6350">
-            <a:solidFill>
-              <a:schemeClr val="tx1"/>
-            </a:solidFill>
-          </a:ln>
-        </p:spPr>
-        <p:style>
-          <a:lnRef idx="2">
-            <a:schemeClr val="accent1">
-              <a:shade val="15000"/>
-            </a:schemeClr>
-          </a:lnRef>
-          <a:fillRef idx="1">
-            <a:schemeClr val="accent1"/>
-          </a:fillRef>
-          <a:effectRef idx="0">
-            <a:schemeClr val="accent1"/>
-          </a:effectRef>
-          <a:fontRef idx="minor">
-            <a:schemeClr val="lt1"/>
-          </a:fontRef>
-        </p:style>
-        <p:txBody>
-          <a:bodyPr rtlCol="0" anchor="ctr"/>
-          <a:lstStyle/>
-          <a:p>
-            <a:pPr algn="ctr"/>
-            <a:r>
-              <a:rPr lang="de-CH" dirty="0">
-                <a:solidFill>
-                  <a:schemeClr val="tx1"/>
-                </a:solidFill>
-                <a:latin typeface="Arial" panose="020B0604020202020204" pitchFamily="34" charset="0"/>
-                <a:cs typeface="Arial" panose="020B0604020202020204" pitchFamily="34" charset="0"/>
-              </a:rPr>
-              <a:t>Übernehmen</a:t>
-            </a:r>
-          </a:p>
-        </p:txBody>
-      </p:sp>
-      <p:sp>
-        <p:nvSpPr>
-          <p:cNvPr id="6" name="Rechteck 5">
-            <a:extLst>
-              <a:ext uri="{FF2B5EF4-FFF2-40B4-BE49-F238E27FC236}">
-                <a16:creationId xmlns:a16="http://schemas.microsoft.com/office/drawing/2014/main" id="{7F885B06-3C00-CE0D-2B8C-7E5767F43616}"/>
-              </a:ext>
-            </a:extLst>
-          </p:cNvPr>
-          <p:cNvSpPr/>
-          <p:nvPr/>
-        </p:nvSpPr>
-        <p:spPr>
-          <a:xfrm>
-            <a:off x="5945306" y="4334081"/>
-            <a:ext cx="1507999" cy="289298"/>
-          </a:xfrm>
-          <a:prstGeom prst="rect">
-            <a:avLst/>
-          </a:prstGeom>
-          <a:solidFill>
-            <a:schemeClr val="bg1">
-              <a:lumMod val="85000"/>
-            </a:schemeClr>
-          </a:solidFill>
-          <a:ln w="6350">
-            <a:solidFill>
-              <a:schemeClr val="tx1"/>
-            </a:solidFill>
-          </a:ln>
-        </p:spPr>
-        <p:style>
-          <a:lnRef idx="2">
-            <a:schemeClr val="accent1">
-              <a:shade val="15000"/>
-            </a:schemeClr>
-          </a:lnRef>
-          <a:fillRef idx="1">
-            <a:schemeClr val="accent1"/>
-          </a:fillRef>
-          <a:effectRef idx="0">
-            <a:schemeClr val="accent1"/>
-          </a:effectRef>
-          <a:fontRef idx="minor">
-            <a:schemeClr val="lt1"/>
-          </a:fontRef>
-        </p:style>
-        <p:txBody>
-          <a:bodyPr rtlCol="0" anchor="ctr"/>
-          <a:lstStyle/>
-          <a:p>
-            <a:pPr algn="ctr"/>
-            <a:r>
-              <a:rPr lang="de-CH" dirty="0">
-                <a:solidFill>
-                  <a:schemeClr val="tx1"/>
-                </a:solidFill>
-                <a:latin typeface="Arial" panose="020B0604020202020204" pitchFamily="34" charset="0"/>
-                <a:cs typeface="Arial" panose="020B0604020202020204" pitchFamily="34" charset="0"/>
-              </a:rPr>
-              <a:t>Abbrechen</a:t>
-            </a:r>
-          </a:p>
-        </p:txBody>
-      </p:sp>
     </p:spTree>
     <p:extLst>
       <p:ext uri="{BB962C8B-B14F-4D97-AF65-F5344CB8AC3E}">
